--- a/public/fun/pack/pptx/birthday/돌잔치_08_사진중심_처마밑제비집.pptx
+++ b/public/fun/pack/pptx/birthday/돌잔치_08_사진중심_처마밑제비집.pptx
@@ -3347,7 +3347,7 @@
             <a:r>
               <a:rPr sz="4000" b="1" i="0">
                 <a:solidFill>
-                  <a:srgbClr val="16263B"/>
+                  <a:srgbClr val="1D4072"/>
                 </a:solidFill>
               </a:rPr>
               <a:t>첫 번째 생일</a:t>
@@ -3385,7 +3385,7 @@
             <a:r>
               <a:rPr sz="1700" b="0" i="1">
                 <a:solidFill>
-                  <a:srgbClr val="16263B"/>
+                  <a:srgbClr val="1D4072"/>
                 </a:solidFill>
               </a:rPr>
               <a:t>처음 웃던 순간부터 걸음마까지입니다</a:t>
@@ -3460,7 +3460,7 @@
     <p:bg>
       <p:bgPr>
         <a:solidFill>
-          <a:srgbClr val="F0F4F9"/>
+          <a:srgbClr val="F3F7FC"/>
         </a:solidFill>
         <a:effectLst/>
       </p:bgPr>
@@ -3490,7 +3490,7 @@
             </a:avLst>
           </a:prstGeom>
           <a:solidFill>
-            <a:srgbClr val="D1DEF0"/>
+            <a:srgbClr val="D4E3F7"/>
           </a:solidFill>
           <a:ln>
             <a:noFill/>
@@ -3534,7 +3534,7 @@
             <a:r>
               <a:rPr sz="3000" b="1" i="0">
                 <a:solidFill>
-                  <a:srgbClr val="16263B"/>
+                  <a:srgbClr val="1D4072"/>
                 </a:solidFill>
               </a:rPr>
               <a:t>우리 아기를 소개합니다</a:t>
@@ -3559,11 +3559,11 @@
             </a:avLst>
           </a:prstGeom>
           <a:solidFill>
-            <a:srgbClr val="D1DEF0"/>
+            <a:srgbClr val="D4E3F7"/>
           </a:solidFill>
           <a:ln w="19050">
             <a:solidFill>
-              <a:srgbClr val="2A476F"/>
+              <a:srgbClr val="4981D0"/>
             </a:solidFill>
             <a:prstDash val="dash"/>
           </a:ln>
@@ -3582,7 +3582,7 @@
             <a:r>
               <a:rPr sz="1400" b="0" i="0">
                 <a:solidFill>
-                  <a:srgbClr val="16263B"/>
+                  <a:srgbClr val="1D4072"/>
                 </a:solidFill>
               </a:rPr>
               <a:t>아기 사진을 넣어 주세요</a:t>
@@ -3622,7 +3622,7 @@
                       <a:r>
                         <a:rPr sz="1500" b="1">
                           <a:solidFill>
-                            <a:srgbClr val="16263B"/>
+                            <a:srgbClr val="1D4072"/>
                           </a:solidFill>
                         </a:rPr>
                         <a:t>이름</a:t>
@@ -3632,30 +3632,30 @@
                   <a:tcPr anchor="ctr" marL="73152" marR="73152">
                     <a:lnL w="9525" cap="flat" cmpd="sng" algn="ctr">
                       <a:solidFill>
-                        <a:srgbClr val="D1DEF0"/>
+                        <a:srgbClr val="D4E3F7"/>
                       </a:solidFill>
                       <a:prstDash val="solid"/>
                     </a:lnL>
                     <a:lnR w="9525" cap="flat" cmpd="sng" algn="ctr">
                       <a:solidFill>
-                        <a:srgbClr val="D1DEF0"/>
+                        <a:srgbClr val="D4E3F7"/>
                       </a:solidFill>
                       <a:prstDash val="solid"/>
                     </a:lnR>
                     <a:lnT w="9525" cap="flat" cmpd="sng" algn="ctr">
                       <a:solidFill>
-                        <a:srgbClr val="D1DEF0"/>
+                        <a:srgbClr val="D4E3F7"/>
                       </a:solidFill>
                       <a:prstDash val="solid"/>
                     </a:lnT>
                     <a:lnB w="9525" cap="flat" cmpd="sng" algn="ctr">
                       <a:solidFill>
-                        <a:srgbClr val="D1DEF0"/>
+                        <a:srgbClr val="D4E3F7"/>
                       </a:solidFill>
                       <a:prstDash val="solid"/>
                     </a:lnB>
                     <a:solidFill>
-                      <a:srgbClr val="D1DEF0"/>
+                      <a:srgbClr val="D4E3F7"/>
                     </a:solidFill>
                   </a:tcPr>
                 </a:tc>
@@ -3678,30 +3678,30 @@
                   <a:tcPr anchor="ctr" marL="73152" marR="73152">
                     <a:lnL w="9525" cap="flat" cmpd="sng" algn="ctr">
                       <a:solidFill>
-                        <a:srgbClr val="D1DEF0"/>
+                        <a:srgbClr val="D4E3F7"/>
                       </a:solidFill>
                       <a:prstDash val="solid"/>
                     </a:lnL>
                     <a:lnR w="9525" cap="flat" cmpd="sng" algn="ctr">
                       <a:solidFill>
-                        <a:srgbClr val="D1DEF0"/>
+                        <a:srgbClr val="D4E3F7"/>
                       </a:solidFill>
                       <a:prstDash val="solid"/>
                     </a:lnR>
                     <a:lnT w="9525" cap="flat" cmpd="sng" algn="ctr">
                       <a:solidFill>
-                        <a:srgbClr val="D1DEF0"/>
+                        <a:srgbClr val="D4E3F7"/>
                       </a:solidFill>
                       <a:prstDash val="solid"/>
                     </a:lnT>
                     <a:lnB w="9525" cap="flat" cmpd="sng" algn="ctr">
                       <a:solidFill>
-                        <a:srgbClr val="D1DEF0"/>
+                        <a:srgbClr val="D4E3F7"/>
                       </a:solidFill>
                       <a:prstDash val="solid"/>
                     </a:lnB>
                     <a:solidFill>
-                      <a:srgbClr val="F0F4F9"/>
+                      <a:srgbClr val="F3F7FC"/>
                     </a:solidFill>
                   </a:tcPr>
                 </a:tc>
@@ -3716,7 +3716,7 @@
                       <a:r>
                         <a:rPr sz="1500" b="1">
                           <a:solidFill>
-                            <a:srgbClr val="16263B"/>
+                            <a:srgbClr val="1D4072"/>
                           </a:solidFill>
                         </a:rPr>
                         <a:t>생일</a:t>
@@ -3726,30 +3726,30 @@
                   <a:tcPr anchor="ctr" marL="73152" marR="73152">
                     <a:lnL w="9525" cap="flat" cmpd="sng" algn="ctr">
                       <a:solidFill>
-                        <a:srgbClr val="D1DEF0"/>
+                        <a:srgbClr val="D4E3F7"/>
                       </a:solidFill>
                       <a:prstDash val="solid"/>
                     </a:lnL>
                     <a:lnR w="9525" cap="flat" cmpd="sng" algn="ctr">
                       <a:solidFill>
-                        <a:srgbClr val="D1DEF0"/>
+                        <a:srgbClr val="D4E3F7"/>
                       </a:solidFill>
                       <a:prstDash val="solid"/>
                     </a:lnR>
                     <a:lnT w="9525" cap="flat" cmpd="sng" algn="ctr">
                       <a:solidFill>
-                        <a:srgbClr val="D1DEF0"/>
+                        <a:srgbClr val="D4E3F7"/>
                       </a:solidFill>
                       <a:prstDash val="solid"/>
                     </a:lnT>
                     <a:lnB w="9525" cap="flat" cmpd="sng" algn="ctr">
                       <a:solidFill>
-                        <a:srgbClr val="D1DEF0"/>
+                        <a:srgbClr val="D4E3F7"/>
                       </a:solidFill>
                       <a:prstDash val="solid"/>
                     </a:lnB>
                     <a:solidFill>
-                      <a:srgbClr val="D1DEF0"/>
+                      <a:srgbClr val="D4E3F7"/>
                     </a:solidFill>
                   </a:tcPr>
                 </a:tc>
@@ -3772,25 +3772,25 @@
                   <a:tcPr anchor="ctr" marL="73152" marR="73152">
                     <a:lnL w="9525" cap="flat" cmpd="sng" algn="ctr">
                       <a:solidFill>
-                        <a:srgbClr val="D1DEF0"/>
+                        <a:srgbClr val="D4E3F7"/>
                       </a:solidFill>
                       <a:prstDash val="solid"/>
                     </a:lnL>
                     <a:lnR w="9525" cap="flat" cmpd="sng" algn="ctr">
                       <a:solidFill>
-                        <a:srgbClr val="D1DEF0"/>
+                        <a:srgbClr val="D4E3F7"/>
                       </a:solidFill>
                       <a:prstDash val="solid"/>
                     </a:lnR>
                     <a:lnT w="9525" cap="flat" cmpd="sng" algn="ctr">
                       <a:solidFill>
-                        <a:srgbClr val="D1DEF0"/>
+                        <a:srgbClr val="D4E3F7"/>
                       </a:solidFill>
                       <a:prstDash val="solid"/>
                     </a:lnT>
                     <a:lnB w="9525" cap="flat" cmpd="sng" algn="ctr">
                       <a:solidFill>
-                        <a:srgbClr val="D1DEF0"/>
+                        <a:srgbClr val="D4E3F7"/>
                       </a:solidFill>
                       <a:prstDash val="solid"/>
                     </a:lnB>
@@ -3810,7 +3810,7 @@
                       <a:r>
                         <a:rPr sz="1500" b="1">
                           <a:solidFill>
-                            <a:srgbClr val="16263B"/>
+                            <a:srgbClr val="1D4072"/>
                           </a:solidFill>
                         </a:rPr>
                         <a:t>키 · 몸무게</a:t>
@@ -3820,30 +3820,30 @@
                   <a:tcPr anchor="ctr" marL="73152" marR="73152">
                     <a:lnL w="9525" cap="flat" cmpd="sng" algn="ctr">
                       <a:solidFill>
-                        <a:srgbClr val="D1DEF0"/>
+                        <a:srgbClr val="D4E3F7"/>
                       </a:solidFill>
                       <a:prstDash val="solid"/>
                     </a:lnL>
                     <a:lnR w="9525" cap="flat" cmpd="sng" algn="ctr">
                       <a:solidFill>
-                        <a:srgbClr val="D1DEF0"/>
+                        <a:srgbClr val="D4E3F7"/>
                       </a:solidFill>
                       <a:prstDash val="solid"/>
                     </a:lnR>
                     <a:lnT w="9525" cap="flat" cmpd="sng" algn="ctr">
                       <a:solidFill>
-                        <a:srgbClr val="D1DEF0"/>
+                        <a:srgbClr val="D4E3F7"/>
                       </a:solidFill>
                       <a:prstDash val="solid"/>
                     </a:lnT>
                     <a:lnB w="9525" cap="flat" cmpd="sng" algn="ctr">
                       <a:solidFill>
-                        <a:srgbClr val="D1DEF0"/>
+                        <a:srgbClr val="D4E3F7"/>
                       </a:solidFill>
                       <a:prstDash val="solid"/>
                     </a:lnB>
                     <a:solidFill>
-                      <a:srgbClr val="D1DEF0"/>
+                      <a:srgbClr val="D4E3F7"/>
                     </a:solidFill>
                   </a:tcPr>
                 </a:tc>
@@ -3866,30 +3866,30 @@
                   <a:tcPr anchor="ctr" marL="73152" marR="73152">
                     <a:lnL w="9525" cap="flat" cmpd="sng" algn="ctr">
                       <a:solidFill>
-                        <a:srgbClr val="D1DEF0"/>
+                        <a:srgbClr val="D4E3F7"/>
                       </a:solidFill>
                       <a:prstDash val="solid"/>
                     </a:lnL>
                     <a:lnR w="9525" cap="flat" cmpd="sng" algn="ctr">
                       <a:solidFill>
-                        <a:srgbClr val="D1DEF0"/>
+                        <a:srgbClr val="D4E3F7"/>
                       </a:solidFill>
                       <a:prstDash val="solid"/>
                     </a:lnR>
                     <a:lnT w="9525" cap="flat" cmpd="sng" algn="ctr">
                       <a:solidFill>
-                        <a:srgbClr val="D1DEF0"/>
+                        <a:srgbClr val="D4E3F7"/>
                       </a:solidFill>
                       <a:prstDash val="solid"/>
                     </a:lnT>
                     <a:lnB w="9525" cap="flat" cmpd="sng" algn="ctr">
                       <a:solidFill>
-                        <a:srgbClr val="D1DEF0"/>
+                        <a:srgbClr val="D4E3F7"/>
                       </a:solidFill>
                       <a:prstDash val="solid"/>
                     </a:lnB>
                     <a:solidFill>
-                      <a:srgbClr val="F0F4F9"/>
+                      <a:srgbClr val="F3F7FC"/>
                     </a:solidFill>
                   </a:tcPr>
                 </a:tc>
@@ -3904,7 +3904,7 @@
                       <a:r>
                         <a:rPr sz="1500" b="1">
                           <a:solidFill>
-                            <a:srgbClr val="16263B"/>
+                            <a:srgbClr val="1D4072"/>
                           </a:solidFill>
                         </a:rPr>
                         <a:t>좋아하는 것</a:t>
@@ -3914,30 +3914,30 @@
                   <a:tcPr anchor="ctr" marL="73152" marR="73152">
                     <a:lnL w="9525" cap="flat" cmpd="sng" algn="ctr">
                       <a:solidFill>
-                        <a:srgbClr val="D1DEF0"/>
+                        <a:srgbClr val="D4E3F7"/>
                       </a:solidFill>
                       <a:prstDash val="solid"/>
                     </a:lnL>
                     <a:lnR w="9525" cap="flat" cmpd="sng" algn="ctr">
                       <a:solidFill>
-                        <a:srgbClr val="D1DEF0"/>
+                        <a:srgbClr val="D4E3F7"/>
                       </a:solidFill>
                       <a:prstDash val="solid"/>
                     </a:lnR>
                     <a:lnT w="9525" cap="flat" cmpd="sng" algn="ctr">
                       <a:solidFill>
-                        <a:srgbClr val="D1DEF0"/>
+                        <a:srgbClr val="D4E3F7"/>
                       </a:solidFill>
                       <a:prstDash val="solid"/>
                     </a:lnT>
                     <a:lnB w="9525" cap="flat" cmpd="sng" algn="ctr">
                       <a:solidFill>
-                        <a:srgbClr val="D1DEF0"/>
+                        <a:srgbClr val="D4E3F7"/>
                       </a:solidFill>
                       <a:prstDash val="solid"/>
                     </a:lnB>
                     <a:solidFill>
-                      <a:srgbClr val="D1DEF0"/>
+                      <a:srgbClr val="D4E3F7"/>
                     </a:solidFill>
                   </a:tcPr>
                 </a:tc>
@@ -3960,25 +3960,25 @@
                   <a:tcPr anchor="ctr" marL="73152" marR="73152">
                     <a:lnL w="9525" cap="flat" cmpd="sng" algn="ctr">
                       <a:solidFill>
-                        <a:srgbClr val="D1DEF0"/>
+                        <a:srgbClr val="D4E3F7"/>
                       </a:solidFill>
                       <a:prstDash val="solid"/>
                     </a:lnL>
                     <a:lnR w="9525" cap="flat" cmpd="sng" algn="ctr">
                       <a:solidFill>
-                        <a:srgbClr val="D1DEF0"/>
+                        <a:srgbClr val="D4E3F7"/>
                       </a:solidFill>
                       <a:prstDash val="solid"/>
                     </a:lnR>
                     <a:lnT w="9525" cap="flat" cmpd="sng" algn="ctr">
                       <a:solidFill>
-                        <a:srgbClr val="D1DEF0"/>
+                        <a:srgbClr val="D4E3F7"/>
                       </a:solidFill>
                       <a:prstDash val="solid"/>
                     </a:lnT>
                     <a:lnB w="9525" cap="flat" cmpd="sng" algn="ctr">
                       <a:solidFill>
-                        <a:srgbClr val="D1DEF0"/>
+                        <a:srgbClr val="D4E3F7"/>
                       </a:solidFill>
                       <a:prstDash val="solid"/>
                     </a:lnB>
@@ -3998,7 +3998,7 @@
                       <a:r>
                         <a:rPr sz="1500" b="1">
                           <a:solidFill>
-                            <a:srgbClr val="16263B"/>
+                            <a:srgbClr val="1D4072"/>
                           </a:solidFill>
                         </a:rPr>
                         <a:t>별명</a:t>
@@ -4008,30 +4008,30 @@
                   <a:tcPr anchor="ctr" marL="73152" marR="73152">
                     <a:lnL w="9525" cap="flat" cmpd="sng" algn="ctr">
                       <a:solidFill>
-                        <a:srgbClr val="D1DEF0"/>
+                        <a:srgbClr val="D4E3F7"/>
                       </a:solidFill>
                       <a:prstDash val="solid"/>
                     </a:lnL>
                     <a:lnR w="9525" cap="flat" cmpd="sng" algn="ctr">
                       <a:solidFill>
-                        <a:srgbClr val="D1DEF0"/>
+                        <a:srgbClr val="D4E3F7"/>
                       </a:solidFill>
                       <a:prstDash val="solid"/>
                     </a:lnR>
                     <a:lnT w="9525" cap="flat" cmpd="sng" algn="ctr">
                       <a:solidFill>
-                        <a:srgbClr val="D1DEF0"/>
+                        <a:srgbClr val="D4E3F7"/>
                       </a:solidFill>
                       <a:prstDash val="solid"/>
                     </a:lnT>
                     <a:lnB w="9525" cap="flat" cmpd="sng" algn="ctr">
                       <a:solidFill>
-                        <a:srgbClr val="D1DEF0"/>
+                        <a:srgbClr val="D4E3F7"/>
                       </a:solidFill>
                       <a:prstDash val="solid"/>
                     </a:lnB>
                     <a:solidFill>
-                      <a:srgbClr val="D1DEF0"/>
+                      <a:srgbClr val="D4E3F7"/>
                     </a:solidFill>
                   </a:tcPr>
                 </a:tc>
@@ -4054,30 +4054,30 @@
                   <a:tcPr anchor="ctr" marL="73152" marR="73152">
                     <a:lnL w="9525" cap="flat" cmpd="sng" algn="ctr">
                       <a:solidFill>
-                        <a:srgbClr val="D1DEF0"/>
+                        <a:srgbClr val="D4E3F7"/>
                       </a:solidFill>
                       <a:prstDash val="solid"/>
                     </a:lnL>
                     <a:lnR w="9525" cap="flat" cmpd="sng" algn="ctr">
                       <a:solidFill>
-                        <a:srgbClr val="D1DEF0"/>
+                        <a:srgbClr val="D4E3F7"/>
                       </a:solidFill>
                       <a:prstDash val="solid"/>
                     </a:lnR>
                     <a:lnT w="9525" cap="flat" cmpd="sng" algn="ctr">
                       <a:solidFill>
-                        <a:srgbClr val="D1DEF0"/>
+                        <a:srgbClr val="D4E3F7"/>
                       </a:solidFill>
                       <a:prstDash val="solid"/>
                     </a:lnT>
                     <a:lnB w="9525" cap="flat" cmpd="sng" algn="ctr">
                       <a:solidFill>
-                        <a:srgbClr val="D1DEF0"/>
+                        <a:srgbClr val="D4E3F7"/>
                       </a:solidFill>
                       <a:prstDash val="solid"/>
                     </a:lnB>
                     <a:solidFill>
-                      <a:srgbClr val="F0F4F9"/>
+                      <a:srgbClr val="F3F7FC"/>
                     </a:solidFill>
                   </a:tcPr>
                 </a:tc>
@@ -4092,7 +4092,7 @@
                       <a:r>
                         <a:rPr sz="1500" b="1">
                           <a:solidFill>
-                            <a:srgbClr val="16263B"/>
+                            <a:srgbClr val="1D4072"/>
                           </a:solidFill>
                         </a:rPr>
                         <a:t>부모의 마음</a:t>
@@ -4102,30 +4102,30 @@
                   <a:tcPr anchor="ctr" marL="73152" marR="73152">
                     <a:lnL w="9525" cap="flat" cmpd="sng" algn="ctr">
                       <a:solidFill>
-                        <a:srgbClr val="D1DEF0"/>
+                        <a:srgbClr val="D4E3F7"/>
                       </a:solidFill>
                       <a:prstDash val="solid"/>
                     </a:lnL>
                     <a:lnR w="9525" cap="flat" cmpd="sng" algn="ctr">
                       <a:solidFill>
-                        <a:srgbClr val="D1DEF0"/>
+                        <a:srgbClr val="D4E3F7"/>
                       </a:solidFill>
                       <a:prstDash val="solid"/>
                     </a:lnR>
                     <a:lnT w="9525" cap="flat" cmpd="sng" algn="ctr">
                       <a:solidFill>
-                        <a:srgbClr val="D1DEF0"/>
+                        <a:srgbClr val="D4E3F7"/>
                       </a:solidFill>
                       <a:prstDash val="solid"/>
                     </a:lnT>
                     <a:lnB w="9525" cap="flat" cmpd="sng" algn="ctr">
                       <a:solidFill>
-                        <a:srgbClr val="D1DEF0"/>
+                        <a:srgbClr val="D4E3F7"/>
                       </a:solidFill>
                       <a:prstDash val="solid"/>
                     </a:lnB>
                     <a:solidFill>
-                      <a:srgbClr val="D1DEF0"/>
+                      <a:srgbClr val="D4E3F7"/>
                     </a:solidFill>
                   </a:tcPr>
                 </a:tc>
@@ -4148,25 +4148,25 @@
                   <a:tcPr anchor="ctr" marL="73152" marR="73152">
                     <a:lnL w="9525" cap="flat" cmpd="sng" algn="ctr">
                       <a:solidFill>
-                        <a:srgbClr val="D1DEF0"/>
+                        <a:srgbClr val="D4E3F7"/>
                       </a:solidFill>
                       <a:prstDash val="solid"/>
                     </a:lnL>
                     <a:lnR w="9525" cap="flat" cmpd="sng" algn="ctr">
                       <a:solidFill>
-                        <a:srgbClr val="D1DEF0"/>
+                        <a:srgbClr val="D4E3F7"/>
                       </a:solidFill>
                       <a:prstDash val="solid"/>
                     </a:lnR>
                     <a:lnT w="9525" cap="flat" cmpd="sng" algn="ctr">
                       <a:solidFill>
-                        <a:srgbClr val="D1DEF0"/>
+                        <a:srgbClr val="D4E3F7"/>
                       </a:solidFill>
                       <a:prstDash val="solid"/>
                     </a:lnT>
                     <a:lnB w="9525" cap="flat" cmpd="sng" algn="ctr">
                       <a:solidFill>
-                        <a:srgbClr val="D1DEF0"/>
+                        <a:srgbClr val="D4E3F7"/>
                       </a:solidFill>
                       <a:prstDash val="solid"/>
                     </a:lnB>
@@ -4194,7 +4194,7 @@
     <p:bg>
       <p:bgPr>
         <a:solidFill>
-          <a:srgbClr val="F0F4F9"/>
+          <a:srgbClr val="F3F7FC"/>
         </a:solidFill>
         <a:effectLst/>
       </p:bgPr>
@@ -4224,7 +4224,7 @@
             </a:avLst>
           </a:prstGeom>
           <a:solidFill>
-            <a:srgbClr val="D1DEF0"/>
+            <a:srgbClr val="D4E3F7"/>
           </a:solidFill>
           <a:ln>
             <a:noFill/>
@@ -4268,7 +4268,7 @@
             <a:r>
               <a:rPr sz="3000" b="1" i="0">
                 <a:solidFill>
-                  <a:srgbClr val="16263B"/>
+                  <a:srgbClr val="1D4072"/>
                 </a:solidFill>
               </a:rPr>
               <a:t>첫 번째 생일 사진</a:t>
@@ -4293,11 +4293,11 @@
             </a:avLst>
           </a:prstGeom>
           <a:solidFill>
-            <a:srgbClr val="D1DEF0"/>
+            <a:srgbClr val="D4E3F7"/>
           </a:solidFill>
           <a:ln w="19050">
             <a:solidFill>
-              <a:srgbClr val="2A476F"/>
+              <a:srgbClr val="4981D0"/>
             </a:solidFill>
             <a:prstDash val="dash"/>
           </a:ln>
@@ -4316,7 +4316,7 @@
             <a:r>
               <a:rPr sz="1400" b="0" i="0">
                 <a:solidFill>
-                  <a:srgbClr val="16263B"/>
+                  <a:srgbClr val="1D4072"/>
                 </a:solidFill>
               </a:rPr>
               <a:t>대표 사진 1</a:t>
@@ -4341,11 +4341,11 @@
             </a:avLst>
           </a:prstGeom>
           <a:solidFill>
-            <a:srgbClr val="D1DEF0"/>
+            <a:srgbClr val="D4E3F7"/>
           </a:solidFill>
           <a:ln w="19050">
             <a:solidFill>
-              <a:srgbClr val="2A476F"/>
+              <a:srgbClr val="4981D0"/>
             </a:solidFill>
             <a:prstDash val="dash"/>
           </a:ln>
@@ -4364,7 +4364,7 @@
             <a:r>
               <a:rPr sz="1400" b="0" i="0">
                 <a:solidFill>
-                  <a:srgbClr val="16263B"/>
+                  <a:srgbClr val="1D4072"/>
                 </a:solidFill>
               </a:rPr>
               <a:t>대표 사진 2</a:t>
@@ -4386,7 +4386,7 @@
     <p:bg>
       <p:bgPr>
         <a:solidFill>
-          <a:srgbClr val="F0F4F9"/>
+          <a:srgbClr val="F3F7FC"/>
         </a:solidFill>
         <a:effectLst/>
       </p:bgPr>
@@ -4416,7 +4416,7 @@
             </a:avLst>
           </a:prstGeom>
           <a:solidFill>
-            <a:srgbClr val="D1DEF0"/>
+            <a:srgbClr val="D4E3F7"/>
           </a:solidFill>
           <a:ln>
             <a:noFill/>
@@ -4460,7 +4460,7 @@
             <a:r>
               <a:rPr sz="3000" b="1" i="0">
                 <a:solidFill>
-                  <a:srgbClr val="16263B"/>
+                  <a:srgbClr val="1D4072"/>
                 </a:solidFill>
               </a:rPr>
               <a:t>한 해의 순간들</a:t>
@@ -4485,11 +4485,11 @@
             </a:avLst>
           </a:prstGeom>
           <a:solidFill>
-            <a:srgbClr val="D1DEF0"/>
+            <a:srgbClr val="D4E3F7"/>
           </a:solidFill>
           <a:ln w="19050">
             <a:solidFill>
-              <a:srgbClr val="2A476F"/>
+              <a:srgbClr val="4981D0"/>
             </a:solidFill>
             <a:prstDash val="dash"/>
           </a:ln>
@@ -4508,7 +4508,7 @@
             <a:r>
               <a:rPr sz="1200" b="0" i="0">
                 <a:solidFill>
-                  <a:srgbClr val="16263B"/>
+                  <a:srgbClr val="1D4072"/>
                 </a:solidFill>
               </a:rPr>
               <a:t>사진 1</a:t>
@@ -4533,11 +4533,11 @@
             </a:avLst>
           </a:prstGeom>
           <a:solidFill>
-            <a:srgbClr val="D1DEF0"/>
+            <a:srgbClr val="D4E3F7"/>
           </a:solidFill>
           <a:ln w="19050">
             <a:solidFill>
-              <a:srgbClr val="2A476F"/>
+              <a:srgbClr val="4981D0"/>
             </a:solidFill>
             <a:prstDash val="dash"/>
           </a:ln>
@@ -4556,7 +4556,7 @@
             <a:r>
               <a:rPr sz="1200" b="0" i="0">
                 <a:solidFill>
-                  <a:srgbClr val="16263B"/>
+                  <a:srgbClr val="1D4072"/>
                 </a:solidFill>
               </a:rPr>
               <a:t>사진 2</a:t>
@@ -4581,11 +4581,11 @@
             </a:avLst>
           </a:prstGeom>
           <a:solidFill>
-            <a:srgbClr val="D1DEF0"/>
+            <a:srgbClr val="D4E3F7"/>
           </a:solidFill>
           <a:ln w="19050">
             <a:solidFill>
-              <a:srgbClr val="2A476F"/>
+              <a:srgbClr val="4981D0"/>
             </a:solidFill>
             <a:prstDash val="dash"/>
           </a:ln>
@@ -4604,7 +4604,7 @@
             <a:r>
               <a:rPr sz="1200" b="0" i="0">
                 <a:solidFill>
-                  <a:srgbClr val="16263B"/>
+                  <a:srgbClr val="1D4072"/>
                 </a:solidFill>
               </a:rPr>
               <a:t>사진 3</a:t>
@@ -4629,11 +4629,11 @@
             </a:avLst>
           </a:prstGeom>
           <a:solidFill>
-            <a:srgbClr val="D1DEF0"/>
+            <a:srgbClr val="D4E3F7"/>
           </a:solidFill>
           <a:ln w="19050">
             <a:solidFill>
-              <a:srgbClr val="2A476F"/>
+              <a:srgbClr val="4981D0"/>
             </a:solidFill>
             <a:prstDash val="dash"/>
           </a:ln>
@@ -4652,7 +4652,7 @@
             <a:r>
               <a:rPr sz="1200" b="0" i="0">
                 <a:solidFill>
-                  <a:srgbClr val="16263B"/>
+                  <a:srgbClr val="1D4072"/>
                 </a:solidFill>
               </a:rPr>
               <a:t>사진 4</a:t>
@@ -4677,11 +4677,11 @@
             </a:avLst>
           </a:prstGeom>
           <a:solidFill>
-            <a:srgbClr val="D1DEF0"/>
+            <a:srgbClr val="D4E3F7"/>
           </a:solidFill>
           <a:ln w="19050">
             <a:solidFill>
-              <a:srgbClr val="2A476F"/>
+              <a:srgbClr val="4981D0"/>
             </a:solidFill>
             <a:prstDash val="dash"/>
           </a:ln>
@@ -4700,7 +4700,7 @@
             <a:r>
               <a:rPr sz="1200" b="0" i="0">
                 <a:solidFill>
-                  <a:srgbClr val="16263B"/>
+                  <a:srgbClr val="1D4072"/>
                 </a:solidFill>
               </a:rPr>
               <a:t>사진 5</a:t>
@@ -4725,11 +4725,11 @@
             </a:avLst>
           </a:prstGeom>
           <a:solidFill>
-            <a:srgbClr val="D1DEF0"/>
+            <a:srgbClr val="D4E3F7"/>
           </a:solidFill>
           <a:ln w="19050">
             <a:solidFill>
-              <a:srgbClr val="2A476F"/>
+              <a:srgbClr val="4981D0"/>
             </a:solidFill>
             <a:prstDash val="dash"/>
           </a:ln>
@@ -4748,7 +4748,7 @@
             <a:r>
               <a:rPr sz="1200" b="0" i="0">
                 <a:solidFill>
-                  <a:srgbClr val="16263B"/>
+                  <a:srgbClr val="1D4072"/>
                 </a:solidFill>
               </a:rPr>
               <a:t>사진 6</a:t>
@@ -4770,7 +4770,7 @@
     <p:bg>
       <p:bgPr>
         <a:solidFill>
-          <a:srgbClr val="F0F4F9"/>
+          <a:srgbClr val="F3F7FC"/>
         </a:solidFill>
         <a:effectLst/>
       </p:bgPr>
@@ -4800,7 +4800,7 @@
             </a:avLst>
           </a:prstGeom>
           <a:solidFill>
-            <a:srgbClr val="D1DEF0"/>
+            <a:srgbClr val="D4E3F7"/>
           </a:solidFill>
           <a:ln>
             <a:noFill/>
@@ -4844,7 +4844,7 @@
             <a:r>
               <a:rPr sz="3000" b="1" i="0">
                 <a:solidFill>
-                  <a:srgbClr val="16263B"/>
+                  <a:srgbClr val="1D4072"/>
                 </a:solidFill>
               </a:rPr>
               <a:t>사진 모음</a:t>
@@ -4869,11 +4869,11 @@
             </a:avLst>
           </a:prstGeom>
           <a:solidFill>
-            <a:srgbClr val="D1DEF0"/>
+            <a:srgbClr val="D4E3F7"/>
           </a:solidFill>
           <a:ln w="19050">
             <a:solidFill>
-              <a:srgbClr val="2A476F"/>
+              <a:srgbClr val="4981D0"/>
             </a:solidFill>
             <a:prstDash val="dash"/>
           </a:ln>
@@ -4892,7 +4892,7 @@
             <a:r>
               <a:rPr sz="1200" b="0" i="0">
                 <a:solidFill>
-                  <a:srgbClr val="16263B"/>
+                  <a:srgbClr val="1D4072"/>
                 </a:solidFill>
               </a:rPr>
               <a:t>사진 1</a:t>
@@ -4917,11 +4917,11 @@
             </a:avLst>
           </a:prstGeom>
           <a:solidFill>
-            <a:srgbClr val="D1DEF0"/>
+            <a:srgbClr val="D4E3F7"/>
           </a:solidFill>
           <a:ln w="19050">
             <a:solidFill>
-              <a:srgbClr val="2A476F"/>
+              <a:srgbClr val="4981D0"/>
             </a:solidFill>
             <a:prstDash val="dash"/>
           </a:ln>
@@ -4940,7 +4940,7 @@
             <a:r>
               <a:rPr sz="1200" b="0" i="0">
                 <a:solidFill>
-                  <a:srgbClr val="16263B"/>
+                  <a:srgbClr val="1D4072"/>
                 </a:solidFill>
               </a:rPr>
               <a:t>사진 2</a:t>
@@ -4965,11 +4965,11 @@
             </a:avLst>
           </a:prstGeom>
           <a:solidFill>
-            <a:srgbClr val="D1DEF0"/>
+            <a:srgbClr val="D4E3F7"/>
           </a:solidFill>
           <a:ln w="19050">
             <a:solidFill>
-              <a:srgbClr val="2A476F"/>
+              <a:srgbClr val="4981D0"/>
             </a:solidFill>
             <a:prstDash val="dash"/>
           </a:ln>
@@ -4988,7 +4988,7 @@
             <a:r>
               <a:rPr sz="1200" b="0" i="0">
                 <a:solidFill>
-                  <a:srgbClr val="16263B"/>
+                  <a:srgbClr val="1D4072"/>
                 </a:solidFill>
               </a:rPr>
               <a:t>사진 3</a:t>
@@ -5013,11 +5013,11 @@
             </a:avLst>
           </a:prstGeom>
           <a:solidFill>
-            <a:srgbClr val="D1DEF0"/>
+            <a:srgbClr val="D4E3F7"/>
           </a:solidFill>
           <a:ln w="19050">
             <a:solidFill>
-              <a:srgbClr val="2A476F"/>
+              <a:srgbClr val="4981D0"/>
             </a:solidFill>
             <a:prstDash val="dash"/>
           </a:ln>
@@ -5036,7 +5036,7 @@
             <a:r>
               <a:rPr sz="1200" b="0" i="0">
                 <a:solidFill>
-                  <a:srgbClr val="16263B"/>
+                  <a:srgbClr val="1D4072"/>
                 </a:solidFill>
               </a:rPr>
               <a:t>사진 4</a:t>
@@ -5061,11 +5061,11 @@
             </a:avLst>
           </a:prstGeom>
           <a:solidFill>
-            <a:srgbClr val="D1DEF0"/>
+            <a:srgbClr val="D4E3F7"/>
           </a:solidFill>
           <a:ln w="19050">
             <a:solidFill>
-              <a:srgbClr val="2A476F"/>
+              <a:srgbClr val="4981D0"/>
             </a:solidFill>
             <a:prstDash val="dash"/>
           </a:ln>
@@ -5084,7 +5084,7 @@
             <a:r>
               <a:rPr sz="1200" b="0" i="0">
                 <a:solidFill>
-                  <a:srgbClr val="16263B"/>
+                  <a:srgbClr val="1D4072"/>
                 </a:solidFill>
               </a:rPr>
               <a:t>사진 5</a:t>
@@ -5109,11 +5109,11 @@
             </a:avLst>
           </a:prstGeom>
           <a:solidFill>
-            <a:srgbClr val="D1DEF0"/>
+            <a:srgbClr val="D4E3F7"/>
           </a:solidFill>
           <a:ln w="19050">
             <a:solidFill>
-              <a:srgbClr val="2A476F"/>
+              <a:srgbClr val="4981D0"/>
             </a:solidFill>
             <a:prstDash val="dash"/>
           </a:ln>
@@ -5132,7 +5132,7 @@
             <a:r>
               <a:rPr sz="1200" b="0" i="0">
                 <a:solidFill>
-                  <a:srgbClr val="16263B"/>
+                  <a:srgbClr val="1D4072"/>
                 </a:solidFill>
               </a:rPr>
               <a:t>사진 6</a:t>
@@ -5157,11 +5157,11 @@
             </a:avLst>
           </a:prstGeom>
           <a:solidFill>
-            <a:srgbClr val="D1DEF0"/>
+            <a:srgbClr val="D4E3F7"/>
           </a:solidFill>
           <a:ln w="19050">
             <a:solidFill>
-              <a:srgbClr val="2A476F"/>
+              <a:srgbClr val="4981D0"/>
             </a:solidFill>
             <a:prstDash val="dash"/>
           </a:ln>
@@ -5180,7 +5180,7 @@
             <a:r>
               <a:rPr sz="1200" b="0" i="0">
                 <a:solidFill>
-                  <a:srgbClr val="16263B"/>
+                  <a:srgbClr val="1D4072"/>
                 </a:solidFill>
               </a:rPr>
               <a:t>사진 7</a:t>
@@ -5205,11 +5205,11 @@
             </a:avLst>
           </a:prstGeom>
           <a:solidFill>
-            <a:srgbClr val="D1DEF0"/>
+            <a:srgbClr val="D4E3F7"/>
           </a:solidFill>
           <a:ln w="19050">
             <a:solidFill>
-              <a:srgbClr val="2A476F"/>
+              <a:srgbClr val="4981D0"/>
             </a:solidFill>
             <a:prstDash val="dash"/>
           </a:ln>
@@ -5228,7 +5228,7 @@
             <a:r>
               <a:rPr sz="1200" b="0" i="0">
                 <a:solidFill>
-                  <a:srgbClr val="16263B"/>
+                  <a:srgbClr val="1D4072"/>
                 </a:solidFill>
               </a:rPr>
               <a:t>사진 8</a:t>
@@ -5308,7 +5308,7 @@
             <a:r>
               <a:rPr sz="3400" b="1" i="0">
                 <a:solidFill>
-                  <a:srgbClr val="16263B"/>
+                  <a:srgbClr val="1D4072"/>
                 </a:solidFill>
               </a:rPr>
               <a:t>와 주셔서 고맙습니다</a:t>
@@ -5346,7 +5346,7 @@
             <a:r>
               <a:rPr sz="1700" b="0" i="1">
                 <a:solidFill>
-                  <a:srgbClr val="16263B"/>
+                  <a:srgbClr val="1D4072"/>
                 </a:solidFill>
               </a:rPr>
               <a:t>아이가 한 살이 되었습니다</a:t>
@@ -5411,34 +5411,34 @@
         <a:sysClr val="window" lastClr="FFFFFF"/>
       </a:lt1>
       <a:dk2>
-        <a:srgbClr val="16263B"/>
+        <a:srgbClr val="1D4072"/>
       </a:dk2>
       <a:lt2>
-        <a:srgbClr val="F0F4F9"/>
+        <a:srgbClr val="F3F7FC"/>
       </a:lt2>
       <a:accent1>
-        <a:srgbClr val="2A476F"/>
+        <a:srgbClr val="4981D0"/>
       </a:accent1>
       <a:accent2>
-        <a:srgbClr val="91423B"/>
+        <a:srgbClr val="339941"/>
       </a:accent2>
       <a:accent3>
-        <a:srgbClr val="16263B"/>
+        <a:srgbClr val="1D4072"/>
       </a:accent3>
       <a:accent4>
-        <a:srgbClr val="D1DEF0"/>
+        <a:srgbClr val="D4E3F7"/>
       </a:accent4>
       <a:accent5>
-        <a:srgbClr val="5E4455"/>
+        <a:srgbClr val="3E8D88"/>
       </a:accent5>
       <a:accent6>
-        <a:srgbClr val="737D89"/>
+        <a:srgbClr val="778CAA"/>
       </a:accent6>
       <a:hlink>
-        <a:srgbClr val="2A476F"/>
+        <a:srgbClr val="4981D0"/>
       </a:hlink>
       <a:folHlink>
-        <a:srgbClr val="16263B"/>
+        <a:srgbClr val="1D4072"/>
       </a:folHlink>
     </a:clrScheme>
     <a:fontScheme name="Office">

--- a/public/fun/pack/pptx/birthday/돌잔치_08_사진중심_처마밑제비집.pptx
+++ b/public/fun/pack/pptx/birthday/돌잔치_08_사진중심_처마밑제비집.pptx
@@ -3286,6 +3286,14 @@
 <file path=ppt/slides/slide1.xml><?xml version="1.0" encoding="utf-8"?>
 <p:sld xmlns:a="http://schemas.openxmlformats.org/drawingml/2006/main" xmlns:p="http://schemas.openxmlformats.org/presentationml/2006/main" xmlns:r="http://schemas.openxmlformats.org/officeDocument/2006/relationships">
   <p:cSld>
+    <p:bg>
+      <p:bgPr>
+        <a:solidFill>
+          <a:srgbClr val="EAF2FD"/>
+        </a:solidFill>
+        <a:effectLst/>
+      </p:bgPr>
+    </p:bg>
     <p:spTree>
       <p:nvGrpSpPr>
         <p:cNvPr id="1" name=""/>
@@ -3293,30 +3301,120 @@
         <p:nvPr/>
       </p:nvGrpSpPr>
       <p:grpSpPr/>
-      <p:pic>
-        <p:nvPicPr>
-          <p:cNvPr id="3" name="표지 그림" descr="birthday-08.jpg"/>
-          <p:cNvPicPr>
-            <a:picLocks noChangeAspect="1"/>
-          </p:cNvPicPr>
+      <p:sp>
+        <p:nvSpPr>
+          <p:cNvPr id="3" name="사진 자리"/>
+          <p:cNvSpPr/>
           <p:nvPr/>
-        </p:nvPicPr>
-        <p:blipFill>
-          <a:blip r:embed="rId2"/>
-          <a:stretch>
-            <a:fillRect/>
-          </a:stretch>
-        </p:blipFill>
-        <p:spPr>
-          <a:xfrm>
-            <a:off x="0" y="0"/>
-            <a:ext cx="12191695" cy="6858000"/>
+        </p:nvSpPr>
+        <p:spPr>
+          <a:xfrm>
+            <a:off x="7071183" y="960120"/>
+            <a:ext cx="3657508" cy="4526280"/>
+          </a:xfrm>
+          <a:prstGeom prst="roundRect">
+            <a:avLst>
+              <a:gd name="adj" fmla="val 4000"/>
+            </a:avLst>
+          </a:prstGeom>
+          <a:solidFill>
+            <a:srgbClr val="A6C6F2"/>
+          </a:solidFill>
+          <a:ln>
+            <a:noFill/>
+          </a:ln>
+        </p:spPr>
+        <p:txBody>
+          <a:bodyPr rtlCol="0" anchor="ctr" wrap="square" lIns="54864" rIns="54864" tIns="27432" bIns="27432">
+            <a:noAutofit/>
+          </a:bodyPr>
+          <a:lstStyle/>
+          <a:p>
+            <a:pPr algn="ctr">
+              <a:lnSpc>
+                <a:spcPct val="100000"/>
+              </a:lnSpc>
+            </a:pPr>
+            <a:r>
+              <a:rPr sz="1400" b="0" i="0">
+                <a:solidFill>
+                  <a:srgbClr val="273549"/>
+                </a:solidFill>
+              </a:rPr>
+              <a:t>사진을 넣어 주세요</a:t>
+            </a:r>
+          </a:p>
+        </p:txBody>
+      </p:sp>
+      <p:sp>
+        <p:nvSpPr>
+          <p:cNvPr id="4" name="장식"/>
+          <p:cNvSpPr/>
+          <p:nvPr/>
+        </p:nvSpPr>
+        <p:spPr>
+          <a:xfrm>
+            <a:off x="7558851" y="1234439"/>
+            <a:ext cx="3657508" cy="4526280"/>
+          </a:xfrm>
+          <a:prstGeom prst="roundRect">
+            <a:avLst>
+              <a:gd name="adj" fmla="val 4000"/>
+            </a:avLst>
+          </a:prstGeom>
+          <a:noFill/>
+          <a:ln w="9525">
+            <a:solidFill>
+              <a:srgbClr val="26231F"/>
+            </a:solidFill>
+          </a:ln>
+        </p:spPr>
+        <p:txBody>
+          <a:bodyPr rtlCol="0" anchor="ctr"/>
+          <a:lstStyle/>
+          <a:p>
+            <a:pPr algn="ctr"/>
+          </a:p>
+        </p:txBody>
+      </p:sp>
+      <p:sp>
+        <p:nvSpPr>
+          <p:cNvPr id="5" name="라벨"/>
+          <p:cNvSpPr txBox="1"/>
+          <p:nvPr/>
+        </p:nvSpPr>
+        <p:spPr>
+          <a:xfrm>
+            <a:off x="822960" y="2148840"/>
+            <a:ext cx="5608179" cy="274320"/>
           </a:xfrm>
           <a:prstGeom prst="rect">
             <a:avLst/>
           </a:prstGeom>
-        </p:spPr>
-      </p:pic>
+          <a:noFill/>
+        </p:spPr>
+        <p:txBody>
+          <a:bodyPr wrap="square" lIns="54864" rIns="54864" tIns="27432" bIns="27432" anchor="t">
+            <a:noAutofit/>
+          </a:bodyPr>
+          <a:lstStyle/>
+          <a:p>
+            <a:pPr algn="l">
+              <a:lnSpc>
+                <a:spcPct val="115000"/>
+              </a:lnSpc>
+            </a:pPr>
+            <a:r>
+              <a:rPr sz="1000" b="1" i="0" spc="250">
+                <a:solidFill>
+                  <a:srgbClr val="26231F"/>
+                </a:solidFill>
+              </a:rPr>
+              <a:t>FIRST BIRTHDAY</a:t>
+            </a:r>
+          </a:p>
+        </p:txBody>
+      </p:sp>
       <p:sp>
         <p:nvSpPr>
           <p:cNvPr id="2" name="Title 1"/>
@@ -3329,8 +3427,8 @@
         </p:nvSpPr>
         <p:spPr>
           <a:xfrm>
-            <a:off x="853418" y="2057400"/>
-            <a:ext cx="6095847" cy="1554480"/>
+            <a:off x="822960" y="2606040"/>
+            <a:ext cx="5608179" cy="1188720"/>
           </a:xfrm>
         </p:spPr>
         <p:txBody>
@@ -3347,7 +3445,7 @@
             <a:r>
               <a:rPr sz="4000" b="1" i="0">
                 <a:solidFill>
-                  <a:srgbClr val="1D4072"/>
+                  <a:srgbClr val="26231F"/>
                 </a:solidFill>
               </a:rPr>
               <a:t>첫 번째 생일</a:t>
@@ -3357,14 +3455,14 @@
       </p:sp>
       <p:sp>
         <p:nvSpPr>
-          <p:cNvPr id="4" name="한 줄 문구"/>
+          <p:cNvPr id="6" name="한 줄 문구"/>
           <p:cNvSpPr txBox="1"/>
           <p:nvPr/>
         </p:nvSpPr>
         <p:spPr>
           <a:xfrm>
-            <a:off x="853418" y="3749039"/>
-            <a:ext cx="6095847" cy="822960"/>
+            <a:off x="822960" y="3886200"/>
+            <a:ext cx="5608179" cy="822960"/>
           </a:xfrm>
           <a:prstGeom prst="rect">
             <a:avLst/>
@@ -3383,9 +3481,9 @@
               </a:lnSpc>
             </a:pPr>
             <a:r>
-              <a:rPr sz="1700" b="0" i="1">
+              <a:rPr sz="1700" b="0" i="0">
                 <a:solidFill>
-                  <a:srgbClr val="1D4072"/>
+                  <a:srgbClr val="26231F"/>
                 </a:solidFill>
               </a:rPr>
               <a:t>처음 웃던 순간부터 걸음마까지입니다</a:t>
@@ -3395,14 +3493,14 @@
       </p:sp>
       <p:sp>
         <p:nvSpPr>
-          <p:cNvPr id="5" name="안내 문구"/>
+          <p:cNvPr id="7" name="안내 문구"/>
           <p:cNvSpPr txBox="1"/>
           <p:nvPr/>
         </p:nvSpPr>
         <p:spPr>
           <a:xfrm>
-            <a:off x="853418" y="4617720"/>
-            <a:ext cx="6095847" cy="914400"/>
+            <a:off x="822960" y="4754880"/>
+            <a:ext cx="5608179" cy="914400"/>
           </a:xfrm>
           <a:prstGeom prst="rect">
             <a:avLst/>
@@ -3423,10 +3521,10 @@
             <a:r>
               <a:rPr sz="1400" b="0" i="0">
                 <a:solidFill>
-                  <a:srgbClr val="666666"/>
+                  <a:srgbClr val="26231F"/>
                 </a:solidFill>
               </a:rPr>
-              <a:t>아기 이름 · 2027. 00. 00</a:t>
+              <a:t>아기 이름 · 날짜 입력</a:t>
             </a:r>
           </a:p>
           <a:p>
@@ -3438,7 +3536,7 @@
             <a:r>
               <a:rPr sz="1400" b="0" i="0">
                 <a:solidFill>
-                  <a:srgbClr val="666666"/>
+                  <a:srgbClr val="26231F"/>
                 </a:solidFill>
               </a:rPr>
               <a:t>장소를 입력하세요</a:t>
@@ -3460,7 +3558,7 @@
     <p:bg>
       <p:bgPr>
         <a:solidFill>
-          <a:srgbClr val="F3F7FC"/>
+          <a:srgbClr val="FAFBFD"/>
         </a:solidFill>
         <a:effectLst/>
       </p:bgPr>
@@ -3479,18 +3577,15 @@
           <p:nvPr/>
         </p:nvSpPr>
         <p:spPr>
-          <a:xfrm rot="10800000">
-            <a:off x="10637215" y="0"/>
-            <a:ext cx="914400" cy="1554480"/>
-          </a:xfrm>
-          <a:prstGeom prst="round2SameRect">
-            <a:avLst>
-              <a:gd name="adj1" fmla="val 50000"/>
-              <a:gd name="adj2" fmla="val 0"/>
-            </a:avLst>
+          <a:xfrm>
+            <a:off x="640080" y="6400800"/>
+            <a:ext cx="10911535" cy="10972"/>
+          </a:xfrm>
+          <a:prstGeom prst="rect">
+            <a:avLst/>
           </a:prstGeom>
           <a:solidFill>
-            <a:srgbClr val="D4E3F7"/>
+            <a:srgbClr val="26231F"/>
           </a:solidFill>
           <a:ln>
             <a:noFill/>
@@ -3506,6 +3601,73 @@
       </p:sp>
       <p:sp>
         <p:nvSpPr>
+          <p:cNvPr id="4" name="하단 라벨"/>
+          <p:cNvSpPr txBox="1"/>
+          <p:nvPr/>
+        </p:nvSpPr>
+        <p:spPr>
+          <a:xfrm>
+            <a:off x="640080" y="6437376"/>
+            <a:ext cx="5486400" cy="274320"/>
+          </a:xfrm>
+          <a:prstGeom prst="rect">
+            <a:avLst/>
+          </a:prstGeom>
+          <a:noFill/>
+        </p:spPr>
+        <p:txBody>
+          <a:bodyPr wrap="square" lIns="54864" rIns="54864" tIns="27432" bIns="27432" anchor="ctr">
+            <a:noAutofit/>
+          </a:bodyPr>
+          <a:lstStyle/>
+          <a:p>
+            <a:pPr algn="l">
+              <a:lnSpc>
+                <a:spcPct val="115000"/>
+              </a:lnSpc>
+            </a:pPr>
+            <a:r>
+              <a:rPr sz="900" b="1" i="0" spc="250">
+                <a:solidFill>
+                  <a:srgbClr val="26231F"/>
+                </a:solidFill>
+              </a:rPr>
+              <a:t>FIRST BIRTHDAY</a:t>
+            </a:r>
+          </a:p>
+        </p:txBody>
+      </p:sp>
+      <p:sp>
+        <p:nvSpPr>
+          <p:cNvPr id="5" name="포인트"/>
+          <p:cNvSpPr/>
+          <p:nvPr/>
+        </p:nvSpPr>
+        <p:spPr>
+          <a:xfrm>
+            <a:off x="11213287" y="6473952"/>
+            <a:ext cx="219456" cy="219456"/>
+          </a:xfrm>
+          <a:prstGeom prst="round2SameRect">
+            <a:avLst/>
+          </a:prstGeom>
+          <a:solidFill>
+            <a:srgbClr val="97BBED"/>
+          </a:solidFill>
+          <a:ln>
+            <a:noFill/>
+          </a:ln>
+        </p:spPr>
+        <p:txBody>
+          <a:bodyPr rtlCol="0" anchor="ctr"/>
+          <a:lstStyle/>
+          <a:p>
+            <a:pPr algn="ctr"/>
+          </a:p>
+        </p:txBody>
+      </p:sp>
+      <p:sp>
+        <p:nvSpPr>
           <p:cNvPr id="2" name="Title 1"/>
           <p:cNvSpPr>
             <a:spLocks noGrp="1"/>
@@ -3516,8 +3678,8 @@
         </p:nvSpPr>
         <p:spPr>
           <a:xfrm>
-            <a:off x="640080" y="457200"/>
-            <a:ext cx="9722815" cy="868680"/>
+            <a:off x="640080" y="502920"/>
+            <a:ext cx="10911535" cy="914400"/>
           </a:xfrm>
         </p:spPr>
         <p:txBody>
@@ -3534,7 +3696,7 @@
             <a:r>
               <a:rPr sz="3000" b="1" i="0">
                 <a:solidFill>
-                  <a:srgbClr val="1D4072"/>
+                  <a:srgbClr val="26231F"/>
                 </a:solidFill>
               </a:rPr>
               <a:t>우리 아기를 소개합니다</a:t>
@@ -3544,14 +3706,14 @@
       </p:sp>
       <p:sp>
         <p:nvSpPr>
-          <p:cNvPr id="4" name="사진 자리"/>
+          <p:cNvPr id="6" name="사진 자리"/>
           <p:cNvSpPr/>
           <p:nvPr/>
         </p:nvSpPr>
         <p:spPr>
           <a:xfrm>
             <a:off x="640080" y="1600200"/>
-            <a:ext cx="3840480" cy="4617720"/>
+            <a:ext cx="3840480" cy="4389120"/>
           </a:xfrm>
           <a:prstGeom prst="roundRect">
             <a:avLst>
@@ -3559,12 +3721,10 @@
             </a:avLst>
           </a:prstGeom>
           <a:solidFill>
-            <a:srgbClr val="D4E3F7"/>
+            <a:srgbClr val="D1E2FA"/>
           </a:solidFill>
           <a:ln w="19050">
-            <a:solidFill>
-              <a:srgbClr val="4981D0"/>
-            </a:solidFill>
+            <a:noFill/>
             <a:prstDash val="dash"/>
           </a:ln>
         </p:spPr>
@@ -3582,7 +3742,7 @@
             <a:r>
               <a:rPr sz="1400" b="0" i="0">
                 <a:solidFill>
-                  <a:srgbClr val="1D4072"/>
+                  <a:srgbClr val="8E8780"/>
                 </a:solidFill>
               </a:rPr>
               <a:t>아기 사진을 넣어 주세요</a:t>
@@ -3592,7 +3752,7 @@
       </p:sp>
       <p:graphicFrame>
         <p:nvGraphicFramePr>
-          <p:cNvPr id="5" name="표"/>
+          <p:cNvPr id="7" name="표"/>
           <p:cNvGraphicFramePr>
             <a:graphicFrameLocks noGrp="1"/>
           </p:cNvGraphicFramePr>
@@ -3622,7 +3782,7 @@
                       <a:r>
                         <a:rPr sz="1500" b="1">
                           <a:solidFill>
-                            <a:srgbClr val="1D4072"/>
+                            <a:srgbClr val="273549"/>
                           </a:solidFill>
                         </a:rPr>
                         <a:t>이름</a:t>
@@ -3632,30 +3792,30 @@
                   <a:tcPr anchor="ctr" marL="73152" marR="73152">
                     <a:lnL w="9525" cap="flat" cmpd="sng" algn="ctr">
                       <a:solidFill>
-                        <a:srgbClr val="D4E3F7"/>
+                        <a:srgbClr val="D1E2FA"/>
                       </a:solidFill>
                       <a:prstDash val="solid"/>
                     </a:lnL>
                     <a:lnR w="9525" cap="flat" cmpd="sng" algn="ctr">
                       <a:solidFill>
-                        <a:srgbClr val="D4E3F7"/>
+                        <a:srgbClr val="D1E2FA"/>
                       </a:solidFill>
                       <a:prstDash val="solid"/>
                     </a:lnR>
                     <a:lnT w="9525" cap="flat" cmpd="sng" algn="ctr">
                       <a:solidFill>
-                        <a:srgbClr val="D4E3F7"/>
+                        <a:srgbClr val="D1E2FA"/>
                       </a:solidFill>
                       <a:prstDash val="solid"/>
                     </a:lnT>
                     <a:lnB w="9525" cap="flat" cmpd="sng" algn="ctr">
                       <a:solidFill>
-                        <a:srgbClr val="D4E3F7"/>
+                        <a:srgbClr val="D1E2FA"/>
                       </a:solidFill>
                       <a:prstDash val="solid"/>
                     </a:lnB>
                     <a:solidFill>
-                      <a:srgbClr val="D4E3F7"/>
+                      <a:srgbClr val="D1E2FA"/>
                     </a:solidFill>
                   </a:tcPr>
                 </a:tc>
@@ -3668,7 +3828,7 @@
                       <a:r>
                         <a:rPr sz="1500" b="0">
                           <a:solidFill>
-                            <a:srgbClr val="2B2B2B"/>
+                            <a:srgbClr val="26231F"/>
                           </a:solidFill>
                         </a:rPr>
                         <a:t>입력하세요</a:t>
@@ -3678,30 +3838,30 @@
                   <a:tcPr anchor="ctr" marL="73152" marR="73152">
                     <a:lnL w="9525" cap="flat" cmpd="sng" algn="ctr">
                       <a:solidFill>
-                        <a:srgbClr val="D4E3F7"/>
+                        <a:srgbClr val="D1E2FA"/>
                       </a:solidFill>
                       <a:prstDash val="solid"/>
                     </a:lnL>
                     <a:lnR w="9525" cap="flat" cmpd="sng" algn="ctr">
                       <a:solidFill>
-                        <a:srgbClr val="D4E3F7"/>
+                        <a:srgbClr val="D1E2FA"/>
                       </a:solidFill>
                       <a:prstDash val="solid"/>
                     </a:lnR>
                     <a:lnT w="9525" cap="flat" cmpd="sng" algn="ctr">
                       <a:solidFill>
-                        <a:srgbClr val="D4E3F7"/>
+                        <a:srgbClr val="D1E2FA"/>
                       </a:solidFill>
                       <a:prstDash val="solid"/>
                     </a:lnT>
                     <a:lnB w="9525" cap="flat" cmpd="sng" algn="ctr">
                       <a:solidFill>
-                        <a:srgbClr val="D4E3F7"/>
+                        <a:srgbClr val="D1E2FA"/>
                       </a:solidFill>
                       <a:prstDash val="solid"/>
                     </a:lnB>
                     <a:solidFill>
-                      <a:srgbClr val="F3F7FC"/>
+                      <a:srgbClr val="EAF2FD"/>
                     </a:solidFill>
                   </a:tcPr>
                 </a:tc>
@@ -3716,7 +3876,7 @@
                       <a:r>
                         <a:rPr sz="1500" b="1">
                           <a:solidFill>
-                            <a:srgbClr val="1D4072"/>
+                            <a:srgbClr val="273549"/>
                           </a:solidFill>
                         </a:rPr>
                         <a:t>생일</a:t>
@@ -3726,30 +3886,30 @@
                   <a:tcPr anchor="ctr" marL="73152" marR="73152">
                     <a:lnL w="9525" cap="flat" cmpd="sng" algn="ctr">
                       <a:solidFill>
-                        <a:srgbClr val="D4E3F7"/>
+                        <a:srgbClr val="D1E2FA"/>
                       </a:solidFill>
                       <a:prstDash val="solid"/>
                     </a:lnL>
                     <a:lnR w="9525" cap="flat" cmpd="sng" algn="ctr">
                       <a:solidFill>
-                        <a:srgbClr val="D4E3F7"/>
+                        <a:srgbClr val="D1E2FA"/>
                       </a:solidFill>
                       <a:prstDash val="solid"/>
                     </a:lnR>
                     <a:lnT w="9525" cap="flat" cmpd="sng" algn="ctr">
                       <a:solidFill>
-                        <a:srgbClr val="D4E3F7"/>
+                        <a:srgbClr val="D1E2FA"/>
                       </a:solidFill>
                       <a:prstDash val="solid"/>
                     </a:lnT>
                     <a:lnB w="9525" cap="flat" cmpd="sng" algn="ctr">
                       <a:solidFill>
-                        <a:srgbClr val="D4E3F7"/>
+                        <a:srgbClr val="D1E2FA"/>
                       </a:solidFill>
                       <a:prstDash val="solid"/>
                     </a:lnB>
                     <a:solidFill>
-                      <a:srgbClr val="D4E3F7"/>
+                      <a:srgbClr val="D1E2FA"/>
                     </a:solidFill>
                   </a:tcPr>
                 </a:tc>
@@ -3762,7 +3922,7 @@
                       <a:r>
                         <a:rPr sz="1500" b="0">
                           <a:solidFill>
-                            <a:srgbClr val="2B2B2B"/>
+                            <a:srgbClr val="26231F"/>
                           </a:solidFill>
                         </a:rPr>
                         <a:t>입력하세요</a:t>
@@ -3772,25 +3932,25 @@
                   <a:tcPr anchor="ctr" marL="73152" marR="73152">
                     <a:lnL w="9525" cap="flat" cmpd="sng" algn="ctr">
                       <a:solidFill>
-                        <a:srgbClr val="D4E3F7"/>
+                        <a:srgbClr val="D1E2FA"/>
                       </a:solidFill>
                       <a:prstDash val="solid"/>
                     </a:lnL>
                     <a:lnR w="9525" cap="flat" cmpd="sng" algn="ctr">
                       <a:solidFill>
-                        <a:srgbClr val="D4E3F7"/>
+                        <a:srgbClr val="D1E2FA"/>
                       </a:solidFill>
                       <a:prstDash val="solid"/>
                     </a:lnR>
                     <a:lnT w="9525" cap="flat" cmpd="sng" algn="ctr">
                       <a:solidFill>
-                        <a:srgbClr val="D4E3F7"/>
+                        <a:srgbClr val="D1E2FA"/>
                       </a:solidFill>
                       <a:prstDash val="solid"/>
                     </a:lnT>
                     <a:lnB w="9525" cap="flat" cmpd="sng" algn="ctr">
                       <a:solidFill>
-                        <a:srgbClr val="D4E3F7"/>
+                        <a:srgbClr val="D1E2FA"/>
                       </a:solidFill>
                       <a:prstDash val="solid"/>
                     </a:lnB>
@@ -3810,7 +3970,7 @@
                       <a:r>
                         <a:rPr sz="1500" b="1">
                           <a:solidFill>
-                            <a:srgbClr val="1D4072"/>
+                            <a:srgbClr val="273549"/>
                           </a:solidFill>
                         </a:rPr>
                         <a:t>키 · 몸무게</a:t>
@@ -3820,30 +3980,30 @@
                   <a:tcPr anchor="ctr" marL="73152" marR="73152">
                     <a:lnL w="9525" cap="flat" cmpd="sng" algn="ctr">
                       <a:solidFill>
-                        <a:srgbClr val="D4E3F7"/>
+                        <a:srgbClr val="D1E2FA"/>
                       </a:solidFill>
                       <a:prstDash val="solid"/>
                     </a:lnL>
                     <a:lnR w="9525" cap="flat" cmpd="sng" algn="ctr">
                       <a:solidFill>
-                        <a:srgbClr val="D4E3F7"/>
+                        <a:srgbClr val="D1E2FA"/>
                       </a:solidFill>
                       <a:prstDash val="solid"/>
                     </a:lnR>
                     <a:lnT w="9525" cap="flat" cmpd="sng" algn="ctr">
                       <a:solidFill>
-                        <a:srgbClr val="D4E3F7"/>
+                        <a:srgbClr val="D1E2FA"/>
                       </a:solidFill>
                       <a:prstDash val="solid"/>
                     </a:lnT>
                     <a:lnB w="9525" cap="flat" cmpd="sng" algn="ctr">
                       <a:solidFill>
-                        <a:srgbClr val="D4E3F7"/>
+                        <a:srgbClr val="D1E2FA"/>
                       </a:solidFill>
                       <a:prstDash val="solid"/>
                     </a:lnB>
                     <a:solidFill>
-                      <a:srgbClr val="D4E3F7"/>
+                      <a:srgbClr val="D1E2FA"/>
                     </a:solidFill>
                   </a:tcPr>
                 </a:tc>
@@ -3856,7 +4016,7 @@
                       <a:r>
                         <a:rPr sz="1500" b="0">
                           <a:solidFill>
-                            <a:srgbClr val="2B2B2B"/>
+                            <a:srgbClr val="26231F"/>
                           </a:solidFill>
                         </a:rPr>
                         <a:t>입력하세요</a:t>
@@ -3866,30 +4026,30 @@
                   <a:tcPr anchor="ctr" marL="73152" marR="73152">
                     <a:lnL w="9525" cap="flat" cmpd="sng" algn="ctr">
                       <a:solidFill>
-                        <a:srgbClr val="D4E3F7"/>
+                        <a:srgbClr val="D1E2FA"/>
                       </a:solidFill>
                       <a:prstDash val="solid"/>
                     </a:lnL>
                     <a:lnR w="9525" cap="flat" cmpd="sng" algn="ctr">
                       <a:solidFill>
-                        <a:srgbClr val="D4E3F7"/>
+                        <a:srgbClr val="D1E2FA"/>
                       </a:solidFill>
                       <a:prstDash val="solid"/>
                     </a:lnR>
                     <a:lnT w="9525" cap="flat" cmpd="sng" algn="ctr">
                       <a:solidFill>
-                        <a:srgbClr val="D4E3F7"/>
+                        <a:srgbClr val="D1E2FA"/>
                       </a:solidFill>
                       <a:prstDash val="solid"/>
                     </a:lnT>
                     <a:lnB w="9525" cap="flat" cmpd="sng" algn="ctr">
                       <a:solidFill>
-                        <a:srgbClr val="D4E3F7"/>
+                        <a:srgbClr val="D1E2FA"/>
                       </a:solidFill>
                       <a:prstDash val="solid"/>
                     </a:lnB>
                     <a:solidFill>
-                      <a:srgbClr val="F3F7FC"/>
+                      <a:srgbClr val="EAF2FD"/>
                     </a:solidFill>
                   </a:tcPr>
                 </a:tc>
@@ -3904,7 +4064,7 @@
                       <a:r>
                         <a:rPr sz="1500" b="1">
                           <a:solidFill>
-                            <a:srgbClr val="1D4072"/>
+                            <a:srgbClr val="273549"/>
                           </a:solidFill>
                         </a:rPr>
                         <a:t>좋아하는 것</a:t>
@@ -3914,30 +4074,30 @@
                   <a:tcPr anchor="ctr" marL="73152" marR="73152">
                     <a:lnL w="9525" cap="flat" cmpd="sng" algn="ctr">
                       <a:solidFill>
-                        <a:srgbClr val="D4E3F7"/>
+                        <a:srgbClr val="D1E2FA"/>
                       </a:solidFill>
                       <a:prstDash val="solid"/>
                     </a:lnL>
                     <a:lnR w="9525" cap="flat" cmpd="sng" algn="ctr">
                       <a:solidFill>
-                        <a:srgbClr val="D4E3F7"/>
+                        <a:srgbClr val="D1E2FA"/>
                       </a:solidFill>
                       <a:prstDash val="solid"/>
                     </a:lnR>
                     <a:lnT w="9525" cap="flat" cmpd="sng" algn="ctr">
                       <a:solidFill>
-                        <a:srgbClr val="D4E3F7"/>
+                        <a:srgbClr val="D1E2FA"/>
                       </a:solidFill>
                       <a:prstDash val="solid"/>
                     </a:lnT>
                     <a:lnB w="9525" cap="flat" cmpd="sng" algn="ctr">
                       <a:solidFill>
-                        <a:srgbClr val="D4E3F7"/>
+                        <a:srgbClr val="D1E2FA"/>
                       </a:solidFill>
                       <a:prstDash val="solid"/>
                     </a:lnB>
                     <a:solidFill>
-                      <a:srgbClr val="D4E3F7"/>
+                      <a:srgbClr val="D1E2FA"/>
                     </a:solidFill>
                   </a:tcPr>
                 </a:tc>
@@ -3950,7 +4110,7 @@
                       <a:r>
                         <a:rPr sz="1500" b="0">
                           <a:solidFill>
-                            <a:srgbClr val="2B2B2B"/>
+                            <a:srgbClr val="26231F"/>
                           </a:solidFill>
                         </a:rPr>
                         <a:t>입력하세요</a:t>
@@ -3960,25 +4120,25 @@
                   <a:tcPr anchor="ctr" marL="73152" marR="73152">
                     <a:lnL w="9525" cap="flat" cmpd="sng" algn="ctr">
                       <a:solidFill>
-                        <a:srgbClr val="D4E3F7"/>
+                        <a:srgbClr val="D1E2FA"/>
                       </a:solidFill>
                       <a:prstDash val="solid"/>
                     </a:lnL>
                     <a:lnR w="9525" cap="flat" cmpd="sng" algn="ctr">
                       <a:solidFill>
-                        <a:srgbClr val="D4E3F7"/>
+                        <a:srgbClr val="D1E2FA"/>
                       </a:solidFill>
                       <a:prstDash val="solid"/>
                     </a:lnR>
                     <a:lnT w="9525" cap="flat" cmpd="sng" algn="ctr">
                       <a:solidFill>
-                        <a:srgbClr val="D4E3F7"/>
+                        <a:srgbClr val="D1E2FA"/>
                       </a:solidFill>
                       <a:prstDash val="solid"/>
                     </a:lnT>
                     <a:lnB w="9525" cap="flat" cmpd="sng" algn="ctr">
                       <a:solidFill>
-                        <a:srgbClr val="D4E3F7"/>
+                        <a:srgbClr val="D1E2FA"/>
                       </a:solidFill>
                       <a:prstDash val="solid"/>
                     </a:lnB>
@@ -3998,7 +4158,7 @@
                       <a:r>
                         <a:rPr sz="1500" b="1">
                           <a:solidFill>
-                            <a:srgbClr val="1D4072"/>
+                            <a:srgbClr val="273549"/>
                           </a:solidFill>
                         </a:rPr>
                         <a:t>별명</a:t>
@@ -4008,30 +4168,30 @@
                   <a:tcPr anchor="ctr" marL="73152" marR="73152">
                     <a:lnL w="9525" cap="flat" cmpd="sng" algn="ctr">
                       <a:solidFill>
-                        <a:srgbClr val="D4E3F7"/>
+                        <a:srgbClr val="D1E2FA"/>
                       </a:solidFill>
                       <a:prstDash val="solid"/>
                     </a:lnL>
                     <a:lnR w="9525" cap="flat" cmpd="sng" algn="ctr">
                       <a:solidFill>
-                        <a:srgbClr val="D4E3F7"/>
+                        <a:srgbClr val="D1E2FA"/>
                       </a:solidFill>
                       <a:prstDash val="solid"/>
                     </a:lnR>
                     <a:lnT w="9525" cap="flat" cmpd="sng" algn="ctr">
                       <a:solidFill>
-                        <a:srgbClr val="D4E3F7"/>
+                        <a:srgbClr val="D1E2FA"/>
                       </a:solidFill>
                       <a:prstDash val="solid"/>
                     </a:lnT>
                     <a:lnB w="9525" cap="flat" cmpd="sng" algn="ctr">
                       <a:solidFill>
-                        <a:srgbClr val="D4E3F7"/>
+                        <a:srgbClr val="D1E2FA"/>
                       </a:solidFill>
                       <a:prstDash val="solid"/>
                     </a:lnB>
                     <a:solidFill>
-                      <a:srgbClr val="D4E3F7"/>
+                      <a:srgbClr val="D1E2FA"/>
                     </a:solidFill>
                   </a:tcPr>
                 </a:tc>
@@ -4044,7 +4204,7 @@
                       <a:r>
                         <a:rPr sz="1500" b="0">
                           <a:solidFill>
-                            <a:srgbClr val="2B2B2B"/>
+                            <a:srgbClr val="26231F"/>
                           </a:solidFill>
                         </a:rPr>
                         <a:t>입력하세요</a:t>
@@ -4054,30 +4214,30 @@
                   <a:tcPr anchor="ctr" marL="73152" marR="73152">
                     <a:lnL w="9525" cap="flat" cmpd="sng" algn="ctr">
                       <a:solidFill>
-                        <a:srgbClr val="D4E3F7"/>
+                        <a:srgbClr val="D1E2FA"/>
                       </a:solidFill>
                       <a:prstDash val="solid"/>
                     </a:lnL>
                     <a:lnR w="9525" cap="flat" cmpd="sng" algn="ctr">
                       <a:solidFill>
-                        <a:srgbClr val="D4E3F7"/>
+                        <a:srgbClr val="D1E2FA"/>
                       </a:solidFill>
                       <a:prstDash val="solid"/>
                     </a:lnR>
                     <a:lnT w="9525" cap="flat" cmpd="sng" algn="ctr">
                       <a:solidFill>
-                        <a:srgbClr val="D4E3F7"/>
+                        <a:srgbClr val="D1E2FA"/>
                       </a:solidFill>
                       <a:prstDash val="solid"/>
                     </a:lnT>
                     <a:lnB w="9525" cap="flat" cmpd="sng" algn="ctr">
                       <a:solidFill>
-                        <a:srgbClr val="D4E3F7"/>
+                        <a:srgbClr val="D1E2FA"/>
                       </a:solidFill>
                       <a:prstDash val="solid"/>
                     </a:lnB>
                     <a:solidFill>
-                      <a:srgbClr val="F3F7FC"/>
+                      <a:srgbClr val="EAF2FD"/>
                     </a:solidFill>
                   </a:tcPr>
                 </a:tc>
@@ -4092,7 +4252,7 @@
                       <a:r>
                         <a:rPr sz="1500" b="1">
                           <a:solidFill>
-                            <a:srgbClr val="1D4072"/>
+                            <a:srgbClr val="273549"/>
                           </a:solidFill>
                         </a:rPr>
                         <a:t>부모의 마음</a:t>
@@ -4102,30 +4262,30 @@
                   <a:tcPr anchor="ctr" marL="73152" marR="73152">
                     <a:lnL w="9525" cap="flat" cmpd="sng" algn="ctr">
                       <a:solidFill>
-                        <a:srgbClr val="D4E3F7"/>
+                        <a:srgbClr val="D1E2FA"/>
                       </a:solidFill>
                       <a:prstDash val="solid"/>
                     </a:lnL>
                     <a:lnR w="9525" cap="flat" cmpd="sng" algn="ctr">
                       <a:solidFill>
-                        <a:srgbClr val="D4E3F7"/>
+                        <a:srgbClr val="D1E2FA"/>
                       </a:solidFill>
                       <a:prstDash val="solid"/>
                     </a:lnR>
                     <a:lnT w="9525" cap="flat" cmpd="sng" algn="ctr">
                       <a:solidFill>
-                        <a:srgbClr val="D4E3F7"/>
+                        <a:srgbClr val="D1E2FA"/>
                       </a:solidFill>
                       <a:prstDash val="solid"/>
                     </a:lnT>
                     <a:lnB w="9525" cap="flat" cmpd="sng" algn="ctr">
                       <a:solidFill>
-                        <a:srgbClr val="D4E3F7"/>
+                        <a:srgbClr val="D1E2FA"/>
                       </a:solidFill>
                       <a:prstDash val="solid"/>
                     </a:lnB>
                     <a:solidFill>
-                      <a:srgbClr val="D4E3F7"/>
+                      <a:srgbClr val="D1E2FA"/>
                     </a:solidFill>
                   </a:tcPr>
                 </a:tc>
@@ -4138,7 +4298,7 @@
                       <a:r>
                         <a:rPr sz="1500" b="0">
                           <a:solidFill>
-                            <a:srgbClr val="2B2B2B"/>
+                            <a:srgbClr val="26231F"/>
                           </a:solidFill>
                         </a:rPr>
                         <a:t>입력하세요</a:t>
@@ -4148,25 +4308,25 @@
                   <a:tcPr anchor="ctr" marL="73152" marR="73152">
                     <a:lnL w="9525" cap="flat" cmpd="sng" algn="ctr">
                       <a:solidFill>
-                        <a:srgbClr val="D4E3F7"/>
+                        <a:srgbClr val="D1E2FA"/>
                       </a:solidFill>
                       <a:prstDash val="solid"/>
                     </a:lnL>
                     <a:lnR w="9525" cap="flat" cmpd="sng" algn="ctr">
                       <a:solidFill>
-                        <a:srgbClr val="D4E3F7"/>
+                        <a:srgbClr val="D1E2FA"/>
                       </a:solidFill>
                       <a:prstDash val="solid"/>
                     </a:lnR>
                     <a:lnT w="9525" cap="flat" cmpd="sng" algn="ctr">
                       <a:solidFill>
-                        <a:srgbClr val="D4E3F7"/>
+                        <a:srgbClr val="D1E2FA"/>
                       </a:solidFill>
                       <a:prstDash val="solid"/>
                     </a:lnT>
                     <a:lnB w="9525" cap="flat" cmpd="sng" algn="ctr">
                       <a:solidFill>
-                        <a:srgbClr val="D4E3F7"/>
+                        <a:srgbClr val="D1E2FA"/>
                       </a:solidFill>
                       <a:prstDash val="solid"/>
                     </a:lnB>
@@ -4194,7 +4354,7 @@
     <p:bg>
       <p:bgPr>
         <a:solidFill>
-          <a:srgbClr val="F3F7FC"/>
+          <a:srgbClr val="FAFBFD"/>
         </a:solidFill>
         <a:effectLst/>
       </p:bgPr>
@@ -4213,18 +4373,15 @@
           <p:nvPr/>
         </p:nvSpPr>
         <p:spPr>
-          <a:xfrm rot="10800000">
-            <a:off x="10637215" y="0"/>
-            <a:ext cx="914400" cy="1554480"/>
-          </a:xfrm>
-          <a:prstGeom prst="round2SameRect">
-            <a:avLst>
-              <a:gd name="adj1" fmla="val 50000"/>
-              <a:gd name="adj2" fmla="val 0"/>
-            </a:avLst>
+          <a:xfrm>
+            <a:off x="640080" y="6400800"/>
+            <a:ext cx="10911535" cy="10972"/>
+          </a:xfrm>
+          <a:prstGeom prst="rect">
+            <a:avLst/>
           </a:prstGeom>
           <a:solidFill>
-            <a:srgbClr val="D4E3F7"/>
+            <a:srgbClr val="26231F"/>
           </a:solidFill>
           <a:ln>
             <a:noFill/>
@@ -4240,6 +4397,73 @@
       </p:sp>
       <p:sp>
         <p:nvSpPr>
+          <p:cNvPr id="4" name="하단 라벨"/>
+          <p:cNvSpPr txBox="1"/>
+          <p:nvPr/>
+        </p:nvSpPr>
+        <p:spPr>
+          <a:xfrm>
+            <a:off x="640080" y="6437376"/>
+            <a:ext cx="5486400" cy="274320"/>
+          </a:xfrm>
+          <a:prstGeom prst="rect">
+            <a:avLst/>
+          </a:prstGeom>
+          <a:noFill/>
+        </p:spPr>
+        <p:txBody>
+          <a:bodyPr wrap="square" lIns="54864" rIns="54864" tIns="27432" bIns="27432" anchor="ctr">
+            <a:noAutofit/>
+          </a:bodyPr>
+          <a:lstStyle/>
+          <a:p>
+            <a:pPr algn="l">
+              <a:lnSpc>
+                <a:spcPct val="115000"/>
+              </a:lnSpc>
+            </a:pPr>
+            <a:r>
+              <a:rPr sz="900" b="1" i="0" spc="250">
+                <a:solidFill>
+                  <a:srgbClr val="26231F"/>
+                </a:solidFill>
+              </a:rPr>
+              <a:t>FIRST BIRTHDAY</a:t>
+            </a:r>
+          </a:p>
+        </p:txBody>
+      </p:sp>
+      <p:sp>
+        <p:nvSpPr>
+          <p:cNvPr id="5" name="포인트"/>
+          <p:cNvSpPr/>
+          <p:nvPr/>
+        </p:nvSpPr>
+        <p:spPr>
+          <a:xfrm>
+            <a:off x="11213287" y="6473952"/>
+            <a:ext cx="219456" cy="219456"/>
+          </a:xfrm>
+          <a:prstGeom prst="round2SameRect">
+            <a:avLst/>
+          </a:prstGeom>
+          <a:solidFill>
+            <a:srgbClr val="97BBED"/>
+          </a:solidFill>
+          <a:ln>
+            <a:noFill/>
+          </a:ln>
+        </p:spPr>
+        <p:txBody>
+          <a:bodyPr rtlCol="0" anchor="ctr"/>
+          <a:lstStyle/>
+          <a:p>
+            <a:pPr algn="ctr"/>
+          </a:p>
+        </p:txBody>
+      </p:sp>
+      <p:sp>
+        <p:nvSpPr>
           <p:cNvPr id="2" name="Title 1"/>
           <p:cNvSpPr>
             <a:spLocks noGrp="1"/>
@@ -4250,8 +4474,8 @@
         </p:nvSpPr>
         <p:spPr>
           <a:xfrm>
-            <a:off x="640080" y="457200"/>
-            <a:ext cx="9722815" cy="868680"/>
+            <a:off x="640080" y="502920"/>
+            <a:ext cx="10911535" cy="914400"/>
           </a:xfrm>
         </p:spPr>
         <p:txBody>
@@ -4268,7 +4492,7 @@
             <a:r>
               <a:rPr sz="3000" b="1" i="0">
                 <a:solidFill>
-                  <a:srgbClr val="1D4072"/>
+                  <a:srgbClr val="26231F"/>
                 </a:solidFill>
               </a:rPr>
               <a:t>첫 번째 생일 사진</a:t>
@@ -4278,14 +4502,14 @@
       </p:sp>
       <p:sp>
         <p:nvSpPr>
-          <p:cNvPr id="4" name="사진 자리"/>
+          <p:cNvPr id="6" name="사진 자리"/>
           <p:cNvSpPr/>
           <p:nvPr/>
         </p:nvSpPr>
         <p:spPr>
           <a:xfrm>
             <a:off x="640080" y="1600200"/>
-            <a:ext cx="5318607" cy="4800600"/>
+            <a:ext cx="5318607" cy="4572000"/>
           </a:xfrm>
           <a:prstGeom prst="roundRect">
             <a:avLst>
@@ -4293,12 +4517,10 @@
             </a:avLst>
           </a:prstGeom>
           <a:solidFill>
-            <a:srgbClr val="D4E3F7"/>
+            <a:srgbClr val="D1E2FA"/>
           </a:solidFill>
           <a:ln w="19050">
-            <a:solidFill>
-              <a:srgbClr val="4981D0"/>
-            </a:solidFill>
+            <a:noFill/>
             <a:prstDash val="dash"/>
           </a:ln>
         </p:spPr>
@@ -4316,7 +4538,7 @@
             <a:r>
               <a:rPr sz="1400" b="0" i="0">
                 <a:solidFill>
-                  <a:srgbClr val="1D4072"/>
+                  <a:srgbClr val="8E8780"/>
                 </a:solidFill>
               </a:rPr>
               <a:t>대표 사진 1</a:t>
@@ -4326,14 +4548,14 @@
       </p:sp>
       <p:sp>
         <p:nvSpPr>
-          <p:cNvPr id="5" name="사진 자리"/>
+          <p:cNvPr id="7" name="사진 자리"/>
           <p:cNvSpPr/>
           <p:nvPr/>
         </p:nvSpPr>
         <p:spPr>
           <a:xfrm>
             <a:off x="6233007" y="1600200"/>
-            <a:ext cx="5318607" cy="4800600"/>
+            <a:ext cx="5318607" cy="4572000"/>
           </a:xfrm>
           <a:prstGeom prst="roundRect">
             <a:avLst>
@@ -4341,12 +4563,10 @@
             </a:avLst>
           </a:prstGeom>
           <a:solidFill>
-            <a:srgbClr val="D4E3F7"/>
+            <a:srgbClr val="D1E2FA"/>
           </a:solidFill>
           <a:ln w="19050">
-            <a:solidFill>
-              <a:srgbClr val="4981D0"/>
-            </a:solidFill>
+            <a:noFill/>
             <a:prstDash val="dash"/>
           </a:ln>
         </p:spPr>
@@ -4364,7 +4584,7 @@
             <a:r>
               <a:rPr sz="1400" b="0" i="0">
                 <a:solidFill>
-                  <a:srgbClr val="1D4072"/>
+                  <a:srgbClr val="8E8780"/>
                 </a:solidFill>
               </a:rPr>
               <a:t>대표 사진 2</a:t>
@@ -4386,7 +4606,7 @@
     <p:bg>
       <p:bgPr>
         <a:solidFill>
-          <a:srgbClr val="F3F7FC"/>
+          <a:srgbClr val="FAFBFD"/>
         </a:solidFill>
         <a:effectLst/>
       </p:bgPr>
@@ -4405,18 +4625,15 @@
           <p:nvPr/>
         </p:nvSpPr>
         <p:spPr>
-          <a:xfrm rot="10800000">
-            <a:off x="10637215" y="0"/>
-            <a:ext cx="914400" cy="1554480"/>
-          </a:xfrm>
-          <a:prstGeom prst="round2SameRect">
-            <a:avLst>
-              <a:gd name="adj1" fmla="val 50000"/>
-              <a:gd name="adj2" fmla="val 0"/>
-            </a:avLst>
+          <a:xfrm>
+            <a:off x="640080" y="6400800"/>
+            <a:ext cx="10911535" cy="10972"/>
+          </a:xfrm>
+          <a:prstGeom prst="rect">
+            <a:avLst/>
           </a:prstGeom>
           <a:solidFill>
-            <a:srgbClr val="D4E3F7"/>
+            <a:srgbClr val="26231F"/>
           </a:solidFill>
           <a:ln>
             <a:noFill/>
@@ -4432,6 +4649,73 @@
       </p:sp>
       <p:sp>
         <p:nvSpPr>
+          <p:cNvPr id="4" name="하단 라벨"/>
+          <p:cNvSpPr txBox="1"/>
+          <p:nvPr/>
+        </p:nvSpPr>
+        <p:spPr>
+          <a:xfrm>
+            <a:off x="640080" y="6437376"/>
+            <a:ext cx="5486400" cy="274320"/>
+          </a:xfrm>
+          <a:prstGeom prst="rect">
+            <a:avLst/>
+          </a:prstGeom>
+          <a:noFill/>
+        </p:spPr>
+        <p:txBody>
+          <a:bodyPr wrap="square" lIns="54864" rIns="54864" tIns="27432" bIns="27432" anchor="ctr">
+            <a:noAutofit/>
+          </a:bodyPr>
+          <a:lstStyle/>
+          <a:p>
+            <a:pPr algn="l">
+              <a:lnSpc>
+                <a:spcPct val="115000"/>
+              </a:lnSpc>
+            </a:pPr>
+            <a:r>
+              <a:rPr sz="900" b="1" i="0" spc="250">
+                <a:solidFill>
+                  <a:srgbClr val="26231F"/>
+                </a:solidFill>
+              </a:rPr>
+              <a:t>FIRST BIRTHDAY</a:t>
+            </a:r>
+          </a:p>
+        </p:txBody>
+      </p:sp>
+      <p:sp>
+        <p:nvSpPr>
+          <p:cNvPr id="5" name="포인트"/>
+          <p:cNvSpPr/>
+          <p:nvPr/>
+        </p:nvSpPr>
+        <p:spPr>
+          <a:xfrm>
+            <a:off x="11213287" y="6473952"/>
+            <a:ext cx="219456" cy="219456"/>
+          </a:xfrm>
+          <a:prstGeom prst="round2SameRect">
+            <a:avLst/>
+          </a:prstGeom>
+          <a:solidFill>
+            <a:srgbClr val="97BBED"/>
+          </a:solidFill>
+          <a:ln>
+            <a:noFill/>
+          </a:ln>
+        </p:spPr>
+        <p:txBody>
+          <a:bodyPr rtlCol="0" anchor="ctr"/>
+          <a:lstStyle/>
+          <a:p>
+            <a:pPr algn="ctr"/>
+          </a:p>
+        </p:txBody>
+      </p:sp>
+      <p:sp>
+        <p:nvSpPr>
           <p:cNvPr id="2" name="Title 1"/>
           <p:cNvSpPr>
             <a:spLocks noGrp="1"/>
@@ -4442,8 +4726,8 @@
         </p:nvSpPr>
         <p:spPr>
           <a:xfrm>
-            <a:off x="640080" y="457200"/>
-            <a:ext cx="9722815" cy="868680"/>
+            <a:off x="640080" y="502920"/>
+            <a:ext cx="10911535" cy="914400"/>
           </a:xfrm>
         </p:spPr>
         <p:txBody>
@@ -4460,7 +4744,7 @@
             <a:r>
               <a:rPr sz="3000" b="1" i="0">
                 <a:solidFill>
-                  <a:srgbClr val="1D4072"/>
+                  <a:srgbClr val="26231F"/>
                 </a:solidFill>
               </a:rPr>
               <a:t>한 해의 순간들</a:t>
@@ -4470,14 +4754,14 @@
       </p:sp>
       <p:sp>
         <p:nvSpPr>
-          <p:cNvPr id="4" name="사진 자리"/>
+          <p:cNvPr id="6" name="사진 자리"/>
           <p:cNvSpPr/>
           <p:nvPr/>
         </p:nvSpPr>
         <p:spPr>
           <a:xfrm>
             <a:off x="640080" y="1600200"/>
-            <a:ext cx="3515258" cy="2308860"/>
+            <a:ext cx="3515258" cy="2194560"/>
           </a:xfrm>
           <a:prstGeom prst="roundRect">
             <a:avLst>
@@ -4485,12 +4769,10 @@
             </a:avLst>
           </a:prstGeom>
           <a:solidFill>
-            <a:srgbClr val="D4E3F7"/>
+            <a:srgbClr val="D1E2FA"/>
           </a:solidFill>
           <a:ln w="19050">
-            <a:solidFill>
-              <a:srgbClr val="4981D0"/>
-            </a:solidFill>
+            <a:noFill/>
             <a:prstDash val="dash"/>
           </a:ln>
         </p:spPr>
@@ -4508,7 +4790,7 @@
             <a:r>
               <a:rPr sz="1200" b="0" i="0">
                 <a:solidFill>
-                  <a:srgbClr val="1D4072"/>
+                  <a:srgbClr val="8E8780"/>
                 </a:solidFill>
               </a:rPr>
               <a:t>사진 1</a:t>
@@ -4518,14 +4800,14 @@
       </p:sp>
       <p:sp>
         <p:nvSpPr>
-          <p:cNvPr id="5" name="사진 자리"/>
+          <p:cNvPr id="7" name="사진 자리"/>
           <p:cNvSpPr/>
           <p:nvPr/>
         </p:nvSpPr>
         <p:spPr>
           <a:xfrm>
             <a:off x="4338218" y="1600200"/>
-            <a:ext cx="3515258" cy="2308860"/>
+            <a:ext cx="3515258" cy="2194560"/>
           </a:xfrm>
           <a:prstGeom prst="roundRect">
             <a:avLst>
@@ -4533,12 +4815,10 @@
             </a:avLst>
           </a:prstGeom>
           <a:solidFill>
-            <a:srgbClr val="D4E3F7"/>
+            <a:srgbClr val="D1E2FA"/>
           </a:solidFill>
           <a:ln w="19050">
-            <a:solidFill>
-              <a:srgbClr val="4981D0"/>
-            </a:solidFill>
+            <a:noFill/>
             <a:prstDash val="dash"/>
           </a:ln>
         </p:spPr>
@@ -4556,7 +4836,7 @@
             <a:r>
               <a:rPr sz="1200" b="0" i="0">
                 <a:solidFill>
-                  <a:srgbClr val="1D4072"/>
+                  <a:srgbClr val="8E8780"/>
                 </a:solidFill>
               </a:rPr>
               <a:t>사진 2</a:t>
@@ -4566,14 +4846,14 @@
       </p:sp>
       <p:sp>
         <p:nvSpPr>
-          <p:cNvPr id="6" name="사진 자리"/>
+          <p:cNvPr id="8" name="사진 자리"/>
           <p:cNvSpPr/>
           <p:nvPr/>
         </p:nvSpPr>
         <p:spPr>
           <a:xfrm>
             <a:off x="8036356" y="1600200"/>
-            <a:ext cx="3515258" cy="2308860"/>
+            <a:ext cx="3515258" cy="2194560"/>
           </a:xfrm>
           <a:prstGeom prst="roundRect">
             <a:avLst>
@@ -4581,12 +4861,10 @@
             </a:avLst>
           </a:prstGeom>
           <a:solidFill>
-            <a:srgbClr val="D4E3F7"/>
+            <a:srgbClr val="D1E2FA"/>
           </a:solidFill>
           <a:ln w="19050">
-            <a:solidFill>
-              <a:srgbClr val="4981D0"/>
-            </a:solidFill>
+            <a:noFill/>
             <a:prstDash val="dash"/>
           </a:ln>
         </p:spPr>
@@ -4604,7 +4882,7 @@
             <a:r>
               <a:rPr sz="1200" b="0" i="0">
                 <a:solidFill>
-                  <a:srgbClr val="1D4072"/>
+                  <a:srgbClr val="8E8780"/>
                 </a:solidFill>
               </a:rPr>
               <a:t>사진 3</a:t>
@@ -4614,14 +4892,14 @@
       </p:sp>
       <p:sp>
         <p:nvSpPr>
-          <p:cNvPr id="7" name="사진 자리"/>
+          <p:cNvPr id="9" name="사진 자리"/>
           <p:cNvSpPr/>
           <p:nvPr/>
         </p:nvSpPr>
         <p:spPr>
           <a:xfrm>
-            <a:off x="640080" y="4091939"/>
-            <a:ext cx="3515258" cy="2308860"/>
+            <a:off x="640080" y="3977639"/>
+            <a:ext cx="3515258" cy="2194560"/>
           </a:xfrm>
           <a:prstGeom prst="roundRect">
             <a:avLst>
@@ -4629,12 +4907,10 @@
             </a:avLst>
           </a:prstGeom>
           <a:solidFill>
-            <a:srgbClr val="D4E3F7"/>
+            <a:srgbClr val="D1E2FA"/>
           </a:solidFill>
           <a:ln w="19050">
-            <a:solidFill>
-              <a:srgbClr val="4981D0"/>
-            </a:solidFill>
+            <a:noFill/>
             <a:prstDash val="dash"/>
           </a:ln>
         </p:spPr>
@@ -4652,7 +4928,7 @@
             <a:r>
               <a:rPr sz="1200" b="0" i="0">
                 <a:solidFill>
-                  <a:srgbClr val="1D4072"/>
+                  <a:srgbClr val="8E8780"/>
                 </a:solidFill>
               </a:rPr>
               <a:t>사진 4</a:t>
@@ -4662,14 +4938,14 @@
       </p:sp>
       <p:sp>
         <p:nvSpPr>
-          <p:cNvPr id="8" name="사진 자리"/>
+          <p:cNvPr id="10" name="사진 자리"/>
           <p:cNvSpPr/>
           <p:nvPr/>
         </p:nvSpPr>
         <p:spPr>
           <a:xfrm>
-            <a:off x="4338218" y="4091939"/>
-            <a:ext cx="3515258" cy="2308860"/>
+            <a:off x="4338218" y="3977639"/>
+            <a:ext cx="3515258" cy="2194560"/>
           </a:xfrm>
           <a:prstGeom prst="roundRect">
             <a:avLst>
@@ -4677,12 +4953,10 @@
             </a:avLst>
           </a:prstGeom>
           <a:solidFill>
-            <a:srgbClr val="D4E3F7"/>
+            <a:srgbClr val="D1E2FA"/>
           </a:solidFill>
           <a:ln w="19050">
-            <a:solidFill>
-              <a:srgbClr val="4981D0"/>
-            </a:solidFill>
+            <a:noFill/>
             <a:prstDash val="dash"/>
           </a:ln>
         </p:spPr>
@@ -4700,7 +4974,7 @@
             <a:r>
               <a:rPr sz="1200" b="0" i="0">
                 <a:solidFill>
-                  <a:srgbClr val="1D4072"/>
+                  <a:srgbClr val="8E8780"/>
                 </a:solidFill>
               </a:rPr>
               <a:t>사진 5</a:t>
@@ -4710,14 +4984,14 @@
       </p:sp>
       <p:sp>
         <p:nvSpPr>
-          <p:cNvPr id="9" name="사진 자리"/>
+          <p:cNvPr id="11" name="사진 자리"/>
           <p:cNvSpPr/>
           <p:nvPr/>
         </p:nvSpPr>
         <p:spPr>
           <a:xfrm>
-            <a:off x="8036356" y="4091939"/>
-            <a:ext cx="3515258" cy="2308860"/>
+            <a:off x="8036356" y="3977639"/>
+            <a:ext cx="3515258" cy="2194560"/>
           </a:xfrm>
           <a:prstGeom prst="roundRect">
             <a:avLst>
@@ -4725,12 +4999,10 @@
             </a:avLst>
           </a:prstGeom>
           <a:solidFill>
-            <a:srgbClr val="D4E3F7"/>
+            <a:srgbClr val="D1E2FA"/>
           </a:solidFill>
           <a:ln w="19050">
-            <a:solidFill>
-              <a:srgbClr val="4981D0"/>
-            </a:solidFill>
+            <a:noFill/>
             <a:prstDash val="dash"/>
           </a:ln>
         </p:spPr>
@@ -4748,7 +5020,7 @@
             <a:r>
               <a:rPr sz="1200" b="0" i="0">
                 <a:solidFill>
-                  <a:srgbClr val="1D4072"/>
+                  <a:srgbClr val="8E8780"/>
                 </a:solidFill>
               </a:rPr>
               <a:t>사진 6</a:t>
@@ -4770,7 +5042,7 @@
     <p:bg>
       <p:bgPr>
         <a:solidFill>
-          <a:srgbClr val="F3F7FC"/>
+          <a:srgbClr val="FAFBFD"/>
         </a:solidFill>
         <a:effectLst/>
       </p:bgPr>
@@ -4789,18 +5061,15 @@
           <p:nvPr/>
         </p:nvSpPr>
         <p:spPr>
-          <a:xfrm rot="10800000">
-            <a:off x="10637215" y="0"/>
-            <a:ext cx="914400" cy="1554480"/>
-          </a:xfrm>
-          <a:prstGeom prst="round2SameRect">
-            <a:avLst>
-              <a:gd name="adj1" fmla="val 50000"/>
-              <a:gd name="adj2" fmla="val 0"/>
-            </a:avLst>
+          <a:xfrm>
+            <a:off x="640080" y="6400800"/>
+            <a:ext cx="10911535" cy="10972"/>
+          </a:xfrm>
+          <a:prstGeom prst="rect">
+            <a:avLst/>
           </a:prstGeom>
           <a:solidFill>
-            <a:srgbClr val="D4E3F7"/>
+            <a:srgbClr val="26231F"/>
           </a:solidFill>
           <a:ln>
             <a:noFill/>
@@ -4816,6 +5085,73 @@
       </p:sp>
       <p:sp>
         <p:nvSpPr>
+          <p:cNvPr id="4" name="하단 라벨"/>
+          <p:cNvSpPr txBox="1"/>
+          <p:nvPr/>
+        </p:nvSpPr>
+        <p:spPr>
+          <a:xfrm>
+            <a:off x="640080" y="6437376"/>
+            <a:ext cx="5486400" cy="274320"/>
+          </a:xfrm>
+          <a:prstGeom prst="rect">
+            <a:avLst/>
+          </a:prstGeom>
+          <a:noFill/>
+        </p:spPr>
+        <p:txBody>
+          <a:bodyPr wrap="square" lIns="54864" rIns="54864" tIns="27432" bIns="27432" anchor="ctr">
+            <a:noAutofit/>
+          </a:bodyPr>
+          <a:lstStyle/>
+          <a:p>
+            <a:pPr algn="l">
+              <a:lnSpc>
+                <a:spcPct val="115000"/>
+              </a:lnSpc>
+            </a:pPr>
+            <a:r>
+              <a:rPr sz="900" b="1" i="0" spc="250">
+                <a:solidFill>
+                  <a:srgbClr val="26231F"/>
+                </a:solidFill>
+              </a:rPr>
+              <a:t>FIRST BIRTHDAY</a:t>
+            </a:r>
+          </a:p>
+        </p:txBody>
+      </p:sp>
+      <p:sp>
+        <p:nvSpPr>
+          <p:cNvPr id="5" name="포인트"/>
+          <p:cNvSpPr/>
+          <p:nvPr/>
+        </p:nvSpPr>
+        <p:spPr>
+          <a:xfrm>
+            <a:off x="11213287" y="6473952"/>
+            <a:ext cx="219456" cy="219456"/>
+          </a:xfrm>
+          <a:prstGeom prst="round2SameRect">
+            <a:avLst/>
+          </a:prstGeom>
+          <a:solidFill>
+            <a:srgbClr val="97BBED"/>
+          </a:solidFill>
+          <a:ln>
+            <a:noFill/>
+          </a:ln>
+        </p:spPr>
+        <p:txBody>
+          <a:bodyPr rtlCol="0" anchor="ctr"/>
+          <a:lstStyle/>
+          <a:p>
+            <a:pPr algn="ctr"/>
+          </a:p>
+        </p:txBody>
+      </p:sp>
+      <p:sp>
+        <p:nvSpPr>
           <p:cNvPr id="2" name="Title 1"/>
           <p:cNvSpPr>
             <a:spLocks noGrp="1"/>
@@ -4826,8 +5162,8 @@
         </p:nvSpPr>
         <p:spPr>
           <a:xfrm>
-            <a:off x="640080" y="457200"/>
-            <a:ext cx="9722815" cy="868680"/>
+            <a:off x="640080" y="502920"/>
+            <a:ext cx="10911535" cy="914400"/>
           </a:xfrm>
         </p:spPr>
         <p:txBody>
@@ -4844,7 +5180,7 @@
             <a:r>
               <a:rPr sz="3000" b="1" i="0">
                 <a:solidFill>
-                  <a:srgbClr val="1D4072"/>
+                  <a:srgbClr val="26231F"/>
                 </a:solidFill>
               </a:rPr>
               <a:t>사진 모음</a:t>
@@ -4854,14 +5190,14 @@
       </p:sp>
       <p:sp>
         <p:nvSpPr>
-          <p:cNvPr id="4" name="사진 자리"/>
+          <p:cNvPr id="6" name="사진 자리"/>
           <p:cNvSpPr/>
           <p:nvPr/>
         </p:nvSpPr>
         <p:spPr>
           <a:xfrm>
             <a:off x="640080" y="1600200"/>
-            <a:ext cx="2590723" cy="2308860"/>
+            <a:ext cx="2590723" cy="2194560"/>
           </a:xfrm>
           <a:prstGeom prst="roundRect">
             <a:avLst>
@@ -4869,12 +5205,10 @@
             </a:avLst>
           </a:prstGeom>
           <a:solidFill>
-            <a:srgbClr val="D4E3F7"/>
+            <a:srgbClr val="D1E2FA"/>
           </a:solidFill>
           <a:ln w="19050">
-            <a:solidFill>
-              <a:srgbClr val="4981D0"/>
-            </a:solidFill>
+            <a:noFill/>
             <a:prstDash val="dash"/>
           </a:ln>
         </p:spPr>
@@ -4892,7 +5226,7 @@
             <a:r>
               <a:rPr sz="1200" b="0" i="0">
                 <a:solidFill>
-                  <a:srgbClr val="1D4072"/>
+                  <a:srgbClr val="8E8780"/>
                 </a:solidFill>
               </a:rPr>
               <a:t>사진 1</a:t>
@@ -4902,14 +5236,14 @@
       </p:sp>
       <p:sp>
         <p:nvSpPr>
-          <p:cNvPr id="5" name="사진 자리"/>
+          <p:cNvPr id="7" name="사진 자리"/>
           <p:cNvSpPr/>
           <p:nvPr/>
         </p:nvSpPr>
         <p:spPr>
           <a:xfrm>
             <a:off x="3413683" y="1600200"/>
-            <a:ext cx="2590723" cy="2308860"/>
+            <a:ext cx="2590723" cy="2194560"/>
           </a:xfrm>
           <a:prstGeom prst="roundRect">
             <a:avLst>
@@ -4917,12 +5251,10 @@
             </a:avLst>
           </a:prstGeom>
           <a:solidFill>
-            <a:srgbClr val="D4E3F7"/>
+            <a:srgbClr val="D1E2FA"/>
           </a:solidFill>
           <a:ln w="19050">
-            <a:solidFill>
-              <a:srgbClr val="4981D0"/>
-            </a:solidFill>
+            <a:noFill/>
             <a:prstDash val="dash"/>
           </a:ln>
         </p:spPr>
@@ -4940,7 +5272,7 @@
             <a:r>
               <a:rPr sz="1200" b="0" i="0">
                 <a:solidFill>
-                  <a:srgbClr val="1D4072"/>
+                  <a:srgbClr val="8E8780"/>
                 </a:solidFill>
               </a:rPr>
               <a:t>사진 2</a:t>
@@ -4950,14 +5282,14 @@
       </p:sp>
       <p:sp>
         <p:nvSpPr>
-          <p:cNvPr id="6" name="사진 자리"/>
+          <p:cNvPr id="8" name="사진 자리"/>
           <p:cNvSpPr/>
           <p:nvPr/>
         </p:nvSpPr>
         <p:spPr>
           <a:xfrm>
             <a:off x="6187287" y="1600200"/>
-            <a:ext cx="2590723" cy="2308860"/>
+            <a:ext cx="2590723" cy="2194560"/>
           </a:xfrm>
           <a:prstGeom prst="roundRect">
             <a:avLst>
@@ -4965,12 +5297,10 @@
             </a:avLst>
           </a:prstGeom>
           <a:solidFill>
-            <a:srgbClr val="D4E3F7"/>
+            <a:srgbClr val="D1E2FA"/>
           </a:solidFill>
           <a:ln w="19050">
-            <a:solidFill>
-              <a:srgbClr val="4981D0"/>
-            </a:solidFill>
+            <a:noFill/>
             <a:prstDash val="dash"/>
           </a:ln>
         </p:spPr>
@@ -4988,7 +5318,7 @@
             <a:r>
               <a:rPr sz="1200" b="0" i="0">
                 <a:solidFill>
-                  <a:srgbClr val="1D4072"/>
+                  <a:srgbClr val="8E8780"/>
                 </a:solidFill>
               </a:rPr>
               <a:t>사진 3</a:t>
@@ -4998,14 +5328,14 @@
       </p:sp>
       <p:sp>
         <p:nvSpPr>
-          <p:cNvPr id="7" name="사진 자리"/>
+          <p:cNvPr id="9" name="사진 자리"/>
           <p:cNvSpPr/>
           <p:nvPr/>
         </p:nvSpPr>
         <p:spPr>
           <a:xfrm>
             <a:off x="8960891" y="1600200"/>
-            <a:ext cx="2590723" cy="2308860"/>
+            <a:ext cx="2590723" cy="2194560"/>
           </a:xfrm>
           <a:prstGeom prst="roundRect">
             <a:avLst>
@@ -5013,12 +5343,10 @@
             </a:avLst>
           </a:prstGeom>
           <a:solidFill>
-            <a:srgbClr val="D4E3F7"/>
+            <a:srgbClr val="D1E2FA"/>
           </a:solidFill>
           <a:ln w="19050">
-            <a:solidFill>
-              <a:srgbClr val="4981D0"/>
-            </a:solidFill>
+            <a:noFill/>
             <a:prstDash val="dash"/>
           </a:ln>
         </p:spPr>
@@ -5036,7 +5364,7 @@
             <a:r>
               <a:rPr sz="1200" b="0" i="0">
                 <a:solidFill>
-                  <a:srgbClr val="1D4072"/>
+                  <a:srgbClr val="8E8780"/>
                 </a:solidFill>
               </a:rPr>
               <a:t>사진 4</a:t>
@@ -5046,14 +5374,14 @@
       </p:sp>
       <p:sp>
         <p:nvSpPr>
-          <p:cNvPr id="8" name="사진 자리"/>
+          <p:cNvPr id="10" name="사진 자리"/>
           <p:cNvSpPr/>
           <p:nvPr/>
         </p:nvSpPr>
         <p:spPr>
           <a:xfrm>
-            <a:off x="640080" y="4091939"/>
-            <a:ext cx="2590723" cy="2308860"/>
+            <a:off x="640080" y="3977639"/>
+            <a:ext cx="2590723" cy="2194560"/>
           </a:xfrm>
           <a:prstGeom prst="roundRect">
             <a:avLst>
@@ -5061,12 +5389,10 @@
             </a:avLst>
           </a:prstGeom>
           <a:solidFill>
-            <a:srgbClr val="D4E3F7"/>
+            <a:srgbClr val="D1E2FA"/>
           </a:solidFill>
           <a:ln w="19050">
-            <a:solidFill>
-              <a:srgbClr val="4981D0"/>
-            </a:solidFill>
+            <a:noFill/>
             <a:prstDash val="dash"/>
           </a:ln>
         </p:spPr>
@@ -5084,7 +5410,7 @@
             <a:r>
               <a:rPr sz="1200" b="0" i="0">
                 <a:solidFill>
-                  <a:srgbClr val="1D4072"/>
+                  <a:srgbClr val="8E8780"/>
                 </a:solidFill>
               </a:rPr>
               <a:t>사진 5</a:t>
@@ -5094,14 +5420,14 @@
       </p:sp>
       <p:sp>
         <p:nvSpPr>
-          <p:cNvPr id="9" name="사진 자리"/>
+          <p:cNvPr id="11" name="사진 자리"/>
           <p:cNvSpPr/>
           <p:nvPr/>
         </p:nvSpPr>
         <p:spPr>
           <a:xfrm>
-            <a:off x="3413683" y="4091939"/>
-            <a:ext cx="2590723" cy="2308860"/>
+            <a:off x="3413683" y="3977639"/>
+            <a:ext cx="2590723" cy="2194560"/>
           </a:xfrm>
           <a:prstGeom prst="roundRect">
             <a:avLst>
@@ -5109,12 +5435,10 @@
             </a:avLst>
           </a:prstGeom>
           <a:solidFill>
-            <a:srgbClr val="D4E3F7"/>
+            <a:srgbClr val="D1E2FA"/>
           </a:solidFill>
           <a:ln w="19050">
-            <a:solidFill>
-              <a:srgbClr val="4981D0"/>
-            </a:solidFill>
+            <a:noFill/>
             <a:prstDash val="dash"/>
           </a:ln>
         </p:spPr>
@@ -5132,7 +5456,7 @@
             <a:r>
               <a:rPr sz="1200" b="0" i="0">
                 <a:solidFill>
-                  <a:srgbClr val="1D4072"/>
+                  <a:srgbClr val="8E8780"/>
                 </a:solidFill>
               </a:rPr>
               <a:t>사진 6</a:t>
@@ -5142,14 +5466,14 @@
       </p:sp>
       <p:sp>
         <p:nvSpPr>
-          <p:cNvPr id="10" name="사진 자리"/>
+          <p:cNvPr id="12" name="사진 자리"/>
           <p:cNvSpPr/>
           <p:nvPr/>
         </p:nvSpPr>
         <p:spPr>
           <a:xfrm>
-            <a:off x="6187287" y="4091939"/>
-            <a:ext cx="2590723" cy="2308860"/>
+            <a:off x="6187287" y="3977639"/>
+            <a:ext cx="2590723" cy="2194560"/>
           </a:xfrm>
           <a:prstGeom prst="roundRect">
             <a:avLst>
@@ -5157,12 +5481,10 @@
             </a:avLst>
           </a:prstGeom>
           <a:solidFill>
-            <a:srgbClr val="D4E3F7"/>
+            <a:srgbClr val="D1E2FA"/>
           </a:solidFill>
           <a:ln w="19050">
-            <a:solidFill>
-              <a:srgbClr val="4981D0"/>
-            </a:solidFill>
+            <a:noFill/>
             <a:prstDash val="dash"/>
           </a:ln>
         </p:spPr>
@@ -5180,7 +5502,7 @@
             <a:r>
               <a:rPr sz="1200" b="0" i="0">
                 <a:solidFill>
-                  <a:srgbClr val="1D4072"/>
+                  <a:srgbClr val="8E8780"/>
                 </a:solidFill>
               </a:rPr>
               <a:t>사진 7</a:t>
@@ -5190,14 +5512,14 @@
       </p:sp>
       <p:sp>
         <p:nvSpPr>
-          <p:cNvPr id="11" name="사진 자리"/>
+          <p:cNvPr id="13" name="사진 자리"/>
           <p:cNvSpPr/>
           <p:nvPr/>
         </p:nvSpPr>
         <p:spPr>
           <a:xfrm>
-            <a:off x="8960891" y="4091939"/>
-            <a:ext cx="2590723" cy="2308860"/>
+            <a:off x="8960891" y="3977639"/>
+            <a:ext cx="2590723" cy="2194560"/>
           </a:xfrm>
           <a:prstGeom prst="roundRect">
             <a:avLst>
@@ -5205,12 +5527,10 @@
             </a:avLst>
           </a:prstGeom>
           <a:solidFill>
-            <a:srgbClr val="D4E3F7"/>
+            <a:srgbClr val="D1E2FA"/>
           </a:solidFill>
           <a:ln w="19050">
-            <a:solidFill>
-              <a:srgbClr val="4981D0"/>
-            </a:solidFill>
+            <a:noFill/>
             <a:prstDash val="dash"/>
           </a:ln>
         </p:spPr>
@@ -5228,7 +5548,7 @@
             <a:r>
               <a:rPr sz="1200" b="0" i="0">
                 <a:solidFill>
-                  <a:srgbClr val="1D4072"/>
+                  <a:srgbClr val="8E8780"/>
                 </a:solidFill>
               </a:rPr>
               <a:t>사진 8</a:t>
@@ -5247,6 +5567,14 @@
 <file path=ppt/slides/slide6.xml><?xml version="1.0" encoding="utf-8"?>
 <p:sld xmlns:a="http://schemas.openxmlformats.org/drawingml/2006/main" xmlns:p="http://schemas.openxmlformats.org/presentationml/2006/main" xmlns:r="http://schemas.openxmlformats.org/officeDocument/2006/relationships">
   <p:cSld>
+    <p:bg>
+      <p:bgPr>
+        <a:solidFill>
+          <a:srgbClr val="EAF2FD"/>
+        </a:solidFill>
+        <a:effectLst/>
+      </p:bgPr>
+    </p:bg>
     <p:spTree>
       <p:nvGrpSpPr>
         <p:cNvPr id="1" name=""/>
@@ -5254,30 +5582,120 @@
         <p:nvPr/>
       </p:nvGrpSpPr>
       <p:grpSpPr/>
-      <p:pic>
-        <p:nvPicPr>
-          <p:cNvPr id="3" name="표지 그림" descr="birthday-08.jpg"/>
-          <p:cNvPicPr>
-            <a:picLocks noChangeAspect="1"/>
-          </p:cNvPicPr>
+      <p:sp>
+        <p:nvSpPr>
+          <p:cNvPr id="3" name="사진 자리"/>
+          <p:cNvSpPr/>
           <p:nvPr/>
-        </p:nvPicPr>
-        <p:blipFill>
-          <a:blip r:embed="rId2"/>
-          <a:stretch>
-            <a:fillRect/>
-          </a:stretch>
-        </p:blipFill>
-        <p:spPr>
-          <a:xfrm>
-            <a:off x="0" y="0"/>
-            <a:ext cx="12191695" cy="6858000"/>
+        </p:nvSpPr>
+        <p:spPr>
+          <a:xfrm>
+            <a:off x="7071183" y="960120"/>
+            <a:ext cx="3657508" cy="4526280"/>
+          </a:xfrm>
+          <a:prstGeom prst="roundRect">
+            <a:avLst>
+              <a:gd name="adj" fmla="val 4000"/>
+            </a:avLst>
+          </a:prstGeom>
+          <a:solidFill>
+            <a:srgbClr val="A6C6F2"/>
+          </a:solidFill>
+          <a:ln>
+            <a:noFill/>
+          </a:ln>
+        </p:spPr>
+        <p:txBody>
+          <a:bodyPr rtlCol="0" anchor="ctr" wrap="square" lIns="54864" rIns="54864" tIns="27432" bIns="27432">
+            <a:noAutofit/>
+          </a:bodyPr>
+          <a:lstStyle/>
+          <a:p>
+            <a:pPr algn="ctr">
+              <a:lnSpc>
+                <a:spcPct val="100000"/>
+              </a:lnSpc>
+            </a:pPr>
+            <a:r>
+              <a:rPr sz="1400" b="0" i="0">
+                <a:solidFill>
+                  <a:srgbClr val="273549"/>
+                </a:solidFill>
+              </a:rPr>
+              <a:t>사진을 넣어 주세요</a:t>
+            </a:r>
+          </a:p>
+        </p:txBody>
+      </p:sp>
+      <p:sp>
+        <p:nvSpPr>
+          <p:cNvPr id="4" name="장식"/>
+          <p:cNvSpPr/>
+          <p:nvPr/>
+        </p:nvSpPr>
+        <p:spPr>
+          <a:xfrm>
+            <a:off x="7558851" y="1234439"/>
+            <a:ext cx="3657508" cy="4526280"/>
+          </a:xfrm>
+          <a:prstGeom prst="roundRect">
+            <a:avLst>
+              <a:gd name="adj" fmla="val 4000"/>
+            </a:avLst>
+          </a:prstGeom>
+          <a:noFill/>
+          <a:ln w="9525">
+            <a:solidFill>
+              <a:srgbClr val="26231F"/>
+            </a:solidFill>
+          </a:ln>
+        </p:spPr>
+        <p:txBody>
+          <a:bodyPr rtlCol="0" anchor="ctr"/>
+          <a:lstStyle/>
+          <a:p>
+            <a:pPr algn="ctr"/>
+          </a:p>
+        </p:txBody>
+      </p:sp>
+      <p:sp>
+        <p:nvSpPr>
+          <p:cNvPr id="5" name="라벨"/>
+          <p:cNvSpPr txBox="1"/>
+          <p:nvPr/>
+        </p:nvSpPr>
+        <p:spPr>
+          <a:xfrm>
+            <a:off x="822960" y="2148840"/>
+            <a:ext cx="5608179" cy="274320"/>
           </a:xfrm>
           <a:prstGeom prst="rect">
             <a:avLst/>
           </a:prstGeom>
-        </p:spPr>
-      </p:pic>
+          <a:noFill/>
+        </p:spPr>
+        <p:txBody>
+          <a:bodyPr wrap="square" lIns="54864" rIns="54864" tIns="27432" bIns="27432" anchor="t">
+            <a:noAutofit/>
+          </a:bodyPr>
+          <a:lstStyle/>
+          <a:p>
+            <a:pPr algn="l">
+              <a:lnSpc>
+                <a:spcPct val="115000"/>
+              </a:lnSpc>
+            </a:pPr>
+            <a:r>
+              <a:rPr sz="1000" b="1" i="0" spc="250">
+                <a:solidFill>
+                  <a:srgbClr val="26231F"/>
+                </a:solidFill>
+              </a:rPr>
+              <a:t>FIRST BIRTHDAY</a:t>
+            </a:r>
+          </a:p>
+        </p:txBody>
+      </p:sp>
       <p:sp>
         <p:nvSpPr>
           <p:cNvPr id="2" name="Title 1"/>
@@ -5290,8 +5708,8 @@
         </p:nvSpPr>
         <p:spPr>
           <a:xfrm>
-            <a:off x="853418" y="2057400"/>
-            <a:ext cx="6095847" cy="1554480"/>
+            <a:off x="822960" y="2606040"/>
+            <a:ext cx="5608179" cy="1188720"/>
           </a:xfrm>
         </p:spPr>
         <p:txBody>
@@ -5308,7 +5726,7 @@
             <a:r>
               <a:rPr sz="3400" b="1" i="0">
                 <a:solidFill>
-                  <a:srgbClr val="1D4072"/>
+                  <a:srgbClr val="26231F"/>
                 </a:solidFill>
               </a:rPr>
               <a:t>와 주셔서 고맙습니다</a:t>
@@ -5318,14 +5736,14 @@
       </p:sp>
       <p:sp>
         <p:nvSpPr>
-          <p:cNvPr id="4" name="한 줄 문구"/>
+          <p:cNvPr id="6" name="한 줄 문구"/>
           <p:cNvSpPr txBox="1"/>
           <p:nvPr/>
         </p:nvSpPr>
         <p:spPr>
           <a:xfrm>
-            <a:off x="853418" y="3749039"/>
-            <a:ext cx="6095847" cy="822960"/>
+            <a:off x="822960" y="3886200"/>
+            <a:ext cx="5608179" cy="822960"/>
           </a:xfrm>
           <a:prstGeom prst="rect">
             <a:avLst/>
@@ -5344,9 +5762,9 @@
               </a:lnSpc>
             </a:pPr>
             <a:r>
-              <a:rPr sz="1700" b="0" i="1">
+              <a:rPr sz="1700" b="0" i="0">
                 <a:solidFill>
-                  <a:srgbClr val="1D4072"/>
+                  <a:srgbClr val="26231F"/>
                 </a:solidFill>
               </a:rPr>
               <a:t>아이가 한 살이 되었습니다</a:t>
@@ -5356,14 +5774,14 @@
       </p:sp>
       <p:sp>
         <p:nvSpPr>
-          <p:cNvPr id="5" name="안내 문구"/>
+          <p:cNvPr id="7" name="안내 문구"/>
           <p:cNvSpPr txBox="1"/>
           <p:nvPr/>
         </p:nvSpPr>
         <p:spPr>
           <a:xfrm>
-            <a:off x="853418" y="4617720"/>
-            <a:ext cx="6095847" cy="914400"/>
+            <a:off x="822960" y="4754880"/>
+            <a:ext cx="5608179" cy="914400"/>
           </a:xfrm>
           <a:prstGeom prst="rect">
             <a:avLst/>
@@ -5384,7 +5802,7 @@
             <a:r>
               <a:rPr sz="1400" b="0" i="0">
                 <a:solidFill>
-                  <a:srgbClr val="666666"/>
+                  <a:srgbClr val="26231F"/>
                 </a:solidFill>
               </a:rPr>
               <a:t>아기 이름 · 부모 이름</a:t>
@@ -5411,34 +5829,34 @@
         <a:sysClr val="window" lastClr="FFFFFF"/>
       </a:lt1>
       <a:dk2>
-        <a:srgbClr val="1D4072"/>
+        <a:srgbClr val="273549"/>
       </a:dk2>
       <a:lt2>
-        <a:srgbClr val="F3F7FC"/>
+        <a:srgbClr val="EAF2FD"/>
       </a:lt2>
       <a:accent1>
-        <a:srgbClr val="4981D0"/>
+        <a:srgbClr val="97BBED"/>
       </a:accent1>
       <a:accent2>
-        <a:srgbClr val="339941"/>
+        <a:srgbClr val="BCBAF3"/>
       </a:accent2>
       <a:accent3>
-        <a:srgbClr val="1D4072"/>
+        <a:srgbClr val="273549"/>
       </a:accent3>
       <a:accent4>
-        <a:srgbClr val="D4E3F7"/>
+        <a:srgbClr val="D1E2FA"/>
       </a:accent4>
       <a:accent5>
-        <a:srgbClr val="3E8D88"/>
+        <a:srgbClr val="AABAF0"/>
       </a:accent5>
       <a:accent6>
-        <a:srgbClr val="778CAA"/>
+        <a:srgbClr val="7D8692"/>
       </a:accent6>
       <a:hlink>
-        <a:srgbClr val="4981D0"/>
+        <a:srgbClr val="97BBED"/>
       </a:hlink>
       <a:folHlink>
-        <a:srgbClr val="1D4072"/>
+        <a:srgbClr val="273549"/>
       </a:folHlink>
     </a:clrScheme>
     <a:fontScheme name="Office">
